--- a/presentation/results_slide.pptx
+++ b/presentation/results_slide.pptx
@@ -6,9 +6,17 @@
   </p:sldMasterIdLst>
   <p:sldIdLst>
     <p:sldId id="256" r:id="rId2"/>
+    <p:sldId id="257" r:id="rId3"/>
+    <p:sldId id="258" r:id="rId4"/>
+    <p:sldId id="259" r:id="rId5"/>
+    <p:sldId id="260" r:id="rId6"/>
+    <p:sldId id="261" r:id="rId7"/>
+    <p:sldId id="262" r:id="rId8"/>
+    <p:sldId id="263" r:id="rId9"/>
+    <p:sldId id="264" r:id="rId10"/>
   </p:sldIdLst>
   <p:notesMasterIdLst>
-    <p:notesMasterId r:id="rId3"/>
+    <p:notesMasterId r:id="rId11"/>
   </p:notesMasterIdLst>
   <p:sldSz cx="12192000" cy="6858000"/>
   <p:notesSz cx="6858000" cy="12192000"/>
@@ -526,6 +534,710 @@
             <a:fld id="{F7021451-1387-4CA6-816F-3879F97B5CBC}" type="slidenum">
               <a:rPr lang="en-US"/>
               <a:t>1</a:t>
+            </a:fld>
+            <a:endParaRPr lang="en-US"/>
+          </a:p>
+        </p:txBody>
+      </p:sp>
+    </p:spTree>
+    <p:extLst>
+      <p:ext uri="{BB962C8B-B14F-4D97-AF65-F5344CB8AC3E}">
+        <p14:creationId xmlns:p14="http://schemas.microsoft.com/office/powerpoint/2010/main" val="1024086991"/>
+      </p:ext>
+    </p:extLst>
+  </p:cSld>
+  <p:clrMapOvr>
+    <a:masterClrMapping/>
+  </p:clrMapOvr>
+</p:notes>
+</file>
+
+<file path=ppt/notesSlides/notesSlide2.xml><?xml version="1.0" encoding="utf-8"?>
+<p:notes xmlns:a="http://schemas.openxmlformats.org/drawingml/2006/main" xmlns:r="http://schemas.openxmlformats.org/officeDocument/2006/relationships" xmlns:p="http://schemas.openxmlformats.org/presentationml/2006/main">
+  <p:cSld>
+    <p:spTree>
+      <p:nvGrpSpPr>
+        <p:cNvPr id="1" name=""/>
+        <p:cNvGrpSpPr/>
+        <p:nvPr/>
+      </p:nvGrpSpPr>
+      <p:grpSpPr>
+        <a:xfrm>
+          <a:off x="0" y="0"/>
+          <a:ext cx="0" cy="0"/>
+          <a:chOff x="0" y="0"/>
+          <a:chExt cx="0" cy="0"/>
+        </a:xfrm>
+      </p:grpSpPr>
+      <p:sp>
+        <p:nvSpPr>
+          <p:cNvPr id="2" name="Slide Image Placeholder 1"/>
+          <p:cNvSpPr>
+            <a:spLocks noGrp="1" noRot="1" noChangeAspect="1"/>
+          </p:cNvSpPr>
+          <p:nvPr>
+            <p:ph type="sldImg"/>
+          </p:nvPr>
+        </p:nvSpPr>
+        <p:spPr/>
+      </p:sp>
+      <p:sp>
+        <p:nvSpPr>
+          <p:cNvPr id="3" name="Notes Placeholder 2"/>
+          <p:cNvSpPr>
+            <a:spLocks noGrp="1"/>
+          </p:cNvSpPr>
+          <p:nvPr>
+            <p:ph type="body" idx="1"/>
+          </p:nvPr>
+        </p:nvSpPr>
+        <p:spPr/>
+        <p:txBody>
+          <a:bodyPr/>
+          <a:lstStyle/>
+          <a:p>
+            <a:r>
+              <a:rPr lang="en-US" dirty="0"/>
+              <a:t>Собирает 81% образцов вместо 60%. Возврат на базу одинаковый — 95%. В этом прогоне: 61,1 очка против 75,1, собрано 4 и 6 образцов из 7.</a:t>
+            </a:r>
+            <a:endParaRPr lang="en-US" dirty="0"/>
+          </a:p>
+        </p:txBody>
+      </p:sp>
+      <p:sp>
+        <p:nvSpPr>
+          <p:cNvPr id="4" name="Slide Number Placeholder 3"/>
+          <p:cNvSpPr>
+            <a:spLocks noGrp="1"/>
+          </p:cNvSpPr>
+          <p:nvPr>
+            <p:ph type="sldNum" sz="quarter" idx="10"/>
+          </p:nvPr>
+        </p:nvSpPr>
+        <p:spPr/>
+        <p:txBody>
+          <a:bodyPr/>
+          <a:lstStyle/>
+          <a:p>
+            <a:fld id="{F7021451-1387-4CA6-816F-3879F97B5CBC}" type="slidenum">
+              <a:rPr lang="en-US"/>
+              <a:t>2</a:t>
+            </a:fld>
+            <a:endParaRPr lang="en-US"/>
+          </a:p>
+        </p:txBody>
+      </p:sp>
+    </p:spTree>
+    <p:extLst>
+      <p:ext uri="{BB962C8B-B14F-4D97-AF65-F5344CB8AC3E}">
+        <p14:creationId xmlns:p14="http://schemas.microsoft.com/office/powerpoint/2010/main" val="1024086991"/>
+      </p:ext>
+    </p:extLst>
+  </p:cSld>
+  <p:clrMapOvr>
+    <a:masterClrMapping/>
+  </p:clrMapOvr>
+</p:notes>
+</file>
+
+<file path=ppt/notesSlides/notesSlide3.xml><?xml version="1.0" encoding="utf-8"?>
+<p:notes xmlns:a="http://schemas.openxmlformats.org/drawingml/2006/main" xmlns:r="http://schemas.openxmlformats.org/officeDocument/2006/relationships" xmlns:p="http://schemas.openxmlformats.org/presentationml/2006/main">
+  <p:cSld>
+    <p:spTree>
+      <p:nvGrpSpPr>
+        <p:cNvPr id="1" name=""/>
+        <p:cNvGrpSpPr/>
+        <p:nvPr/>
+      </p:nvGrpSpPr>
+      <p:grpSpPr>
+        <a:xfrm>
+          <a:off x="0" y="0"/>
+          <a:ext cx="0" cy="0"/>
+          <a:chOff x="0" y="0"/>
+          <a:chExt cx="0" cy="0"/>
+        </a:xfrm>
+      </p:grpSpPr>
+      <p:sp>
+        <p:nvSpPr>
+          <p:cNvPr id="2" name="Slide Image Placeholder 1"/>
+          <p:cNvSpPr>
+            <a:spLocks noGrp="1" noRot="1" noChangeAspect="1"/>
+          </p:cNvSpPr>
+          <p:nvPr>
+            <p:ph type="sldImg"/>
+          </p:nvPr>
+        </p:nvSpPr>
+        <p:spPr/>
+      </p:sp>
+      <p:sp>
+        <p:nvSpPr>
+          <p:cNvPr id="3" name="Notes Placeholder 2"/>
+          <p:cNvSpPr>
+            <a:spLocks noGrp="1"/>
+          </p:cNvSpPr>
+          <p:nvPr>
+            <p:ph type="body" idx="1"/>
+          </p:nvPr>
+        </p:nvSpPr>
+        <p:spPr/>
+        <p:txBody>
+          <a:bodyPr/>
+          <a:lstStyle/>
+          <a:p>
+            <a:r>
+              <a:rPr lang="en-US" dirty="0"/>
+              <a:t>Карта вероятностей находит почти всё и тратит на 7 единиц заряда меньше. Спираль — 67,5%. В этом прогоне спираль собрала 3 образца из 5, подъём по сигналу — 4, карта вероятностей — все 5.</a:t>
+            </a:r>
+            <a:endParaRPr lang="en-US" dirty="0"/>
+          </a:p>
+        </p:txBody>
+      </p:sp>
+      <p:sp>
+        <p:nvSpPr>
+          <p:cNvPr id="4" name="Slide Number Placeholder 3"/>
+          <p:cNvSpPr>
+            <a:spLocks noGrp="1"/>
+          </p:cNvSpPr>
+          <p:nvPr>
+            <p:ph type="sldNum" sz="quarter" idx="10"/>
+          </p:nvPr>
+        </p:nvSpPr>
+        <p:spPr/>
+        <p:txBody>
+          <a:bodyPr/>
+          <a:lstStyle/>
+          <a:p>
+            <a:fld id="{F7021451-1387-4CA6-816F-3879F97B5CBC}" type="slidenum">
+              <a:rPr lang="en-US"/>
+              <a:t>3</a:t>
+            </a:fld>
+            <a:endParaRPr lang="en-US"/>
+          </a:p>
+        </p:txBody>
+      </p:sp>
+    </p:spTree>
+    <p:extLst>
+      <p:ext uri="{BB962C8B-B14F-4D97-AF65-F5344CB8AC3E}">
+        <p14:creationId xmlns:p14="http://schemas.microsoft.com/office/powerpoint/2010/main" val="1024086991"/>
+      </p:ext>
+    </p:extLst>
+  </p:cSld>
+  <p:clrMapOvr>
+    <a:masterClrMapping/>
+  </p:clrMapOvr>
+</p:notes>
+</file>
+
+<file path=ppt/notesSlides/notesSlide4.xml><?xml version="1.0" encoding="utf-8"?>
+<p:notes xmlns:a="http://schemas.openxmlformats.org/drawingml/2006/main" xmlns:r="http://schemas.openxmlformats.org/officeDocument/2006/relationships" xmlns:p="http://schemas.openxmlformats.org/presentationml/2006/main">
+  <p:cSld>
+    <p:spTree>
+      <p:nvGrpSpPr>
+        <p:cNvPr id="1" name=""/>
+        <p:cNvGrpSpPr/>
+        <p:nvPr/>
+      </p:nvGrpSpPr>
+      <p:grpSpPr>
+        <a:xfrm>
+          <a:off x="0" y="0"/>
+          <a:ext cx="0" cy="0"/>
+          <a:chOff x="0" y="0"/>
+          <a:chExt cx="0" cy="0"/>
+        </a:xfrm>
+      </p:grpSpPr>
+      <p:sp>
+        <p:nvSpPr>
+          <p:cNvPr id="2" name="Slide Image Placeholder 1"/>
+          <p:cNvSpPr>
+            <a:spLocks noGrp="1" noRot="1" noChangeAspect="1"/>
+          </p:cNvSpPr>
+          <p:nvPr>
+            <p:ph type="sldImg"/>
+          </p:nvPr>
+        </p:nvSpPr>
+        <p:spPr/>
+      </p:sp>
+      <p:sp>
+        <p:nvSpPr>
+          <p:cNvPr id="3" name="Notes Placeholder 2"/>
+          <p:cNvSpPr>
+            <a:spLocks noGrp="1"/>
+          </p:cNvSpPr>
+          <p:nvPr>
+            <p:ph type="body" idx="1"/>
+          </p:nvPr>
+        </p:nvSpPr>
+        <p:spPr/>
+        <p:txBody>
+          <a:bodyPr/>
+          <a:lstStyle/>
+          <a:p>
+            <a:r>
+              <a:rPr lang="en-US" dirty="0"/>
+              <a:t>Заметить сбой и постоять выгоднее, чем ехать по ложным показаниям. Чёрным — путь за время сбоя, жёлтое кольцо — робот ждёт. В этом прогоне: 80,4 очка против 90,6.</a:t>
+            </a:r>
+            <a:endParaRPr lang="en-US" dirty="0"/>
+          </a:p>
+        </p:txBody>
+      </p:sp>
+      <p:sp>
+        <p:nvSpPr>
+          <p:cNvPr id="4" name="Slide Number Placeholder 3"/>
+          <p:cNvSpPr>
+            <a:spLocks noGrp="1"/>
+          </p:cNvSpPr>
+          <p:nvPr>
+            <p:ph type="sldNum" sz="quarter" idx="10"/>
+          </p:nvPr>
+        </p:nvSpPr>
+        <p:spPr/>
+        <p:txBody>
+          <a:bodyPr/>
+          <a:lstStyle/>
+          <a:p>
+            <a:fld id="{F7021451-1387-4CA6-816F-3879F97B5CBC}" type="slidenum">
+              <a:rPr lang="en-US"/>
+              <a:t>4</a:t>
+            </a:fld>
+            <a:endParaRPr lang="en-US"/>
+          </a:p>
+        </p:txBody>
+      </p:sp>
+    </p:spTree>
+    <p:extLst>
+      <p:ext uri="{BB962C8B-B14F-4D97-AF65-F5344CB8AC3E}">
+        <p14:creationId xmlns:p14="http://schemas.microsoft.com/office/powerpoint/2010/main" val="1024086991"/>
+      </p:ext>
+    </p:extLst>
+  </p:cSld>
+  <p:clrMapOvr>
+    <a:masterClrMapping/>
+  </p:clrMapOvr>
+</p:notes>
+</file>
+
+<file path=ppt/notesSlides/notesSlide5.xml><?xml version="1.0" encoding="utf-8"?>
+<p:notes xmlns:a="http://schemas.openxmlformats.org/drawingml/2006/main" xmlns:r="http://schemas.openxmlformats.org/officeDocument/2006/relationships" xmlns:p="http://schemas.openxmlformats.org/presentationml/2006/main">
+  <p:cSld>
+    <p:spTree>
+      <p:nvGrpSpPr>
+        <p:cNvPr id="1" name=""/>
+        <p:cNvGrpSpPr/>
+        <p:nvPr/>
+      </p:nvGrpSpPr>
+      <p:grpSpPr>
+        <a:xfrm>
+          <a:off x="0" y="0"/>
+          <a:ext cx="0" cy="0"/>
+          <a:chOff x="0" y="0"/>
+          <a:chExt cx="0" cy="0"/>
+        </a:xfrm>
+      </p:grpSpPr>
+      <p:sp>
+        <p:nvSpPr>
+          <p:cNvPr id="2" name="Slide Image Placeholder 1"/>
+          <p:cNvSpPr>
+            <a:spLocks noGrp="1" noRot="1" noChangeAspect="1"/>
+          </p:cNvSpPr>
+          <p:nvPr>
+            <p:ph type="sldImg"/>
+          </p:nvPr>
+        </p:nvSpPr>
+        <p:spPr/>
+      </p:sp>
+      <p:sp>
+        <p:nvSpPr>
+          <p:cNvPr id="3" name="Notes Placeholder 2"/>
+          <p:cNvSpPr>
+            <a:spLocks noGrp="1"/>
+          </p:cNvSpPr>
+          <p:nvPr>
+            <p:ph type="body" idx="1"/>
+          </p:nvPr>
+        </p:nvSpPr>
+        <p:spPr/>
+        <p:txBody>
+          <a:bodyPr/>
+          <a:lstStyle/>
+          <a:p>
+            <a:r>
+              <a:rPr lang="en-US" dirty="0"/>
+              <a:t>Меняем текст задания — меняется поведение. На обычной миссии модель счёт не повышает. Правило текста не читает и собирает дальше: 5 образцов. Модель после второго поворачивает на базу.</a:t>
+            </a:r>
+            <a:endParaRPr lang="en-US" dirty="0"/>
+          </a:p>
+        </p:txBody>
+      </p:sp>
+      <p:sp>
+        <p:nvSpPr>
+          <p:cNvPr id="4" name="Slide Number Placeholder 3"/>
+          <p:cNvSpPr>
+            <a:spLocks noGrp="1"/>
+          </p:cNvSpPr>
+          <p:nvPr>
+            <p:ph type="sldNum" sz="quarter" idx="10"/>
+          </p:nvPr>
+        </p:nvSpPr>
+        <p:spPr/>
+        <p:txBody>
+          <a:bodyPr/>
+          <a:lstStyle/>
+          <a:p>
+            <a:fld id="{F7021451-1387-4CA6-816F-3879F97B5CBC}" type="slidenum">
+              <a:rPr lang="en-US"/>
+              <a:t>5</a:t>
+            </a:fld>
+            <a:endParaRPr lang="en-US"/>
+          </a:p>
+        </p:txBody>
+      </p:sp>
+    </p:spTree>
+    <p:extLst>
+      <p:ext uri="{BB962C8B-B14F-4D97-AF65-F5344CB8AC3E}">
+        <p14:creationId xmlns:p14="http://schemas.microsoft.com/office/powerpoint/2010/main" val="1024086991"/>
+      </p:ext>
+    </p:extLst>
+  </p:cSld>
+  <p:clrMapOvr>
+    <a:masterClrMapping/>
+  </p:clrMapOvr>
+</p:notes>
+</file>
+
+<file path=ppt/notesSlides/notesSlide6.xml><?xml version="1.0" encoding="utf-8"?>
+<p:notes xmlns:a="http://schemas.openxmlformats.org/drawingml/2006/main" xmlns:r="http://schemas.openxmlformats.org/officeDocument/2006/relationships" xmlns:p="http://schemas.openxmlformats.org/presentationml/2006/main">
+  <p:cSld>
+    <p:spTree>
+      <p:nvGrpSpPr>
+        <p:cNvPr id="1" name=""/>
+        <p:cNvGrpSpPr/>
+        <p:nvPr/>
+      </p:nvGrpSpPr>
+      <p:grpSpPr>
+        <a:xfrm>
+          <a:off x="0" y="0"/>
+          <a:ext cx="0" cy="0"/>
+          <a:chOff x="0" y="0"/>
+          <a:chExt cx="0" cy="0"/>
+        </a:xfrm>
+      </p:grpSpPr>
+      <p:sp>
+        <p:nvSpPr>
+          <p:cNvPr id="2" name="Slide Image Placeholder 1"/>
+          <p:cNvSpPr>
+            <a:spLocks noGrp="1" noRot="1" noChangeAspect="1"/>
+          </p:cNvSpPr>
+          <p:nvPr>
+            <p:ph type="sldImg"/>
+          </p:nvPr>
+        </p:nvSpPr>
+        <p:spPr/>
+      </p:sp>
+      <p:sp>
+        <p:nvSpPr>
+          <p:cNvPr id="3" name="Notes Placeholder 2"/>
+          <p:cNvSpPr>
+            <a:spLocks noGrp="1"/>
+          </p:cNvSpPr>
+          <p:nvPr>
+            <p:ph type="body" idx="1"/>
+          </p:nvPr>
+        </p:nvSpPr>
+        <p:spPr/>
+        <p:txBody>
+          <a:bodyPr/>
+          <a:lstStyle/>
+          <a:p>
+            <a:r>
+              <a:rPr lang="en-US" dirty="0"/>
+              <a:t>Запрет есть только в тексте задания. Здесь модель отвечает на каждое решение; если часть решений оставить правилу — 1 из 6. Красная черта — граница из задания. Робот на правиле её пересекает, робот с моделью — нет.</a:t>
+            </a:r>
+            <a:endParaRPr lang="en-US" dirty="0"/>
+          </a:p>
+        </p:txBody>
+      </p:sp>
+      <p:sp>
+        <p:nvSpPr>
+          <p:cNvPr id="4" name="Slide Number Placeholder 3"/>
+          <p:cNvSpPr>
+            <a:spLocks noGrp="1"/>
+          </p:cNvSpPr>
+          <p:nvPr>
+            <p:ph type="sldNum" sz="quarter" idx="10"/>
+          </p:nvPr>
+        </p:nvSpPr>
+        <p:spPr/>
+        <p:txBody>
+          <a:bodyPr/>
+          <a:lstStyle/>
+          <a:p>
+            <a:fld id="{F7021451-1387-4CA6-816F-3879F97B5CBC}" type="slidenum">
+              <a:rPr lang="en-US"/>
+              <a:t>6</a:t>
+            </a:fld>
+            <a:endParaRPr lang="en-US"/>
+          </a:p>
+        </p:txBody>
+      </p:sp>
+    </p:spTree>
+    <p:extLst>
+      <p:ext uri="{BB962C8B-B14F-4D97-AF65-F5344CB8AC3E}">
+        <p14:creationId xmlns:p14="http://schemas.microsoft.com/office/powerpoint/2010/main" val="1024086991"/>
+      </p:ext>
+    </p:extLst>
+  </p:cSld>
+  <p:clrMapOvr>
+    <a:masterClrMapping/>
+  </p:clrMapOvr>
+</p:notes>
+</file>
+
+<file path=ppt/notesSlides/notesSlide7.xml><?xml version="1.0" encoding="utf-8"?>
+<p:notes xmlns:a="http://schemas.openxmlformats.org/drawingml/2006/main" xmlns:r="http://schemas.openxmlformats.org/officeDocument/2006/relationships" xmlns:p="http://schemas.openxmlformats.org/presentationml/2006/main">
+  <p:cSld>
+    <p:spTree>
+      <p:nvGrpSpPr>
+        <p:cNvPr id="1" name=""/>
+        <p:cNvGrpSpPr/>
+        <p:nvPr/>
+      </p:nvGrpSpPr>
+      <p:grpSpPr>
+        <a:xfrm>
+          <a:off x="0" y="0"/>
+          <a:ext cx="0" cy="0"/>
+          <a:chOff x="0" y="0"/>
+          <a:chExt cx="0" cy="0"/>
+        </a:xfrm>
+      </p:grpSpPr>
+      <p:sp>
+        <p:nvSpPr>
+          <p:cNvPr id="2" name="Slide Image Placeholder 1"/>
+          <p:cNvSpPr>
+            <a:spLocks noGrp="1" noRot="1" noChangeAspect="1"/>
+          </p:cNvSpPr>
+          <p:nvPr>
+            <p:ph type="sldImg"/>
+          </p:nvPr>
+        </p:nvSpPr>
+        <p:spPr/>
+      </p:sp>
+      <p:sp>
+        <p:nvSpPr>
+          <p:cNvPr id="3" name="Notes Placeholder 2"/>
+          <p:cNvSpPr>
+            <a:spLocks noGrp="1"/>
+          </p:cNvSpPr>
+          <p:nvPr>
+            <p:ph type="body" idx="1"/>
+          </p:nvPr>
+        </p:nvSpPr>
+        <p:spPr/>
+        <p:txBody>
+          <a:bodyPr/>
+          <a:lstStyle/>
+          <a:p>
+            <a:r>
+              <a:rPr lang="en-US" dirty="0"/>
+              <a:t>Исследователь проверяет другие объяснения и ошибается реже. Счёт почти тот же: 68,4 и 67,5. Строка появляется, когда робот выдвигает гипотезу. Ошибка в строке H6: грунт сменился как раз во время измерения.</a:t>
+            </a:r>
+            <a:endParaRPr lang="en-US" dirty="0"/>
+          </a:p>
+        </p:txBody>
+      </p:sp>
+      <p:sp>
+        <p:nvSpPr>
+          <p:cNvPr id="4" name="Slide Number Placeholder 3"/>
+          <p:cNvSpPr>
+            <a:spLocks noGrp="1"/>
+          </p:cNvSpPr>
+          <p:nvPr>
+            <p:ph type="sldNum" sz="quarter" idx="10"/>
+          </p:nvPr>
+        </p:nvSpPr>
+        <p:spPr/>
+        <p:txBody>
+          <a:bodyPr/>
+          <a:lstStyle/>
+          <a:p>
+            <a:fld id="{F7021451-1387-4CA6-816F-3879F97B5CBC}" type="slidenum">
+              <a:rPr lang="en-US"/>
+              <a:t>7</a:t>
+            </a:fld>
+            <a:endParaRPr lang="en-US"/>
+          </a:p>
+        </p:txBody>
+      </p:sp>
+    </p:spTree>
+    <p:extLst>
+      <p:ext uri="{BB962C8B-B14F-4D97-AF65-F5344CB8AC3E}">
+        <p14:creationId xmlns:p14="http://schemas.microsoft.com/office/powerpoint/2010/main" val="1024086991"/>
+      </p:ext>
+    </p:extLst>
+  </p:cSld>
+  <p:clrMapOvr>
+    <a:masterClrMapping/>
+  </p:clrMapOvr>
+</p:notes>
+</file>
+
+<file path=ppt/notesSlides/notesSlide8.xml><?xml version="1.0" encoding="utf-8"?>
+<p:notes xmlns:a="http://schemas.openxmlformats.org/drawingml/2006/main" xmlns:r="http://schemas.openxmlformats.org/officeDocument/2006/relationships" xmlns:p="http://schemas.openxmlformats.org/presentationml/2006/main">
+  <p:cSld>
+    <p:spTree>
+      <p:nvGrpSpPr>
+        <p:cNvPr id="1" name=""/>
+        <p:cNvGrpSpPr/>
+        <p:nvPr/>
+      </p:nvGrpSpPr>
+      <p:grpSpPr>
+        <a:xfrm>
+          <a:off x="0" y="0"/>
+          <a:ext cx="0" cy="0"/>
+          <a:chOff x="0" y="0"/>
+          <a:chExt cx="0" cy="0"/>
+        </a:xfrm>
+      </p:grpSpPr>
+      <p:sp>
+        <p:nvSpPr>
+          <p:cNvPr id="2" name="Slide Image Placeholder 1"/>
+          <p:cNvSpPr>
+            <a:spLocks noGrp="1" noRot="1" noChangeAspect="1"/>
+          </p:cNvSpPr>
+          <p:nvPr>
+            <p:ph type="sldImg"/>
+          </p:nvPr>
+        </p:nvSpPr>
+        <p:spPr/>
+      </p:sp>
+      <p:sp>
+        <p:nvSpPr>
+          <p:cNvPr id="3" name="Notes Placeholder 2"/>
+          <p:cNvSpPr>
+            <a:spLocks noGrp="1"/>
+          </p:cNvSpPr>
+          <p:nvPr>
+            <p:ph type="body" idx="1"/>
+          </p:nvPr>
+        </p:nvSpPr>
+        <p:spPr/>
+        <p:txBody>
+          <a:bodyPr/>
+          <a:lstStyle/>
+          <a:p>
+            <a:r>
+              <a:rPr lang="en-US" dirty="0"/>
+              <a:t>В 7 сценариях из 11 счёт сходится до 6 очков. Систематического сдвига нет. В этом сценарии: 91,3 очка в быстром симуляторе и 90,9 в Gazebo. Бледная линия справа — путь из быстрого симулятора.</a:t>
+            </a:r>
+            <a:endParaRPr lang="en-US" dirty="0"/>
+          </a:p>
+        </p:txBody>
+      </p:sp>
+      <p:sp>
+        <p:nvSpPr>
+          <p:cNvPr id="4" name="Slide Number Placeholder 3"/>
+          <p:cNvSpPr>
+            <a:spLocks noGrp="1"/>
+          </p:cNvSpPr>
+          <p:nvPr>
+            <p:ph type="sldNum" sz="quarter" idx="10"/>
+          </p:nvPr>
+        </p:nvSpPr>
+        <p:spPr/>
+        <p:txBody>
+          <a:bodyPr/>
+          <a:lstStyle/>
+          <a:p>
+            <a:fld id="{F7021451-1387-4CA6-816F-3879F97B5CBC}" type="slidenum">
+              <a:rPr lang="en-US"/>
+              <a:t>8</a:t>
+            </a:fld>
+            <a:endParaRPr lang="en-US"/>
+          </a:p>
+        </p:txBody>
+      </p:sp>
+    </p:spTree>
+    <p:extLst>
+      <p:ext uri="{BB962C8B-B14F-4D97-AF65-F5344CB8AC3E}">
+        <p14:creationId xmlns:p14="http://schemas.microsoft.com/office/powerpoint/2010/main" val="1024086991"/>
+      </p:ext>
+    </p:extLst>
+  </p:cSld>
+  <p:clrMapOvr>
+    <a:masterClrMapping/>
+  </p:clrMapOvr>
+</p:notes>
+</file>
+
+<file path=ppt/notesSlides/notesSlide9.xml><?xml version="1.0" encoding="utf-8"?>
+<p:notes xmlns:a="http://schemas.openxmlformats.org/drawingml/2006/main" xmlns:r="http://schemas.openxmlformats.org/officeDocument/2006/relationships" xmlns:p="http://schemas.openxmlformats.org/presentationml/2006/main">
+  <p:cSld>
+    <p:spTree>
+      <p:nvGrpSpPr>
+        <p:cNvPr id="1" name=""/>
+        <p:cNvGrpSpPr/>
+        <p:nvPr/>
+      </p:nvGrpSpPr>
+      <p:grpSpPr>
+        <a:xfrm>
+          <a:off x="0" y="0"/>
+          <a:ext cx="0" cy="0"/>
+          <a:chOff x="0" y="0"/>
+          <a:chExt cx="0" cy="0"/>
+        </a:xfrm>
+      </p:grpSpPr>
+      <p:sp>
+        <p:nvSpPr>
+          <p:cNvPr id="2" name="Slide Image Placeholder 1"/>
+          <p:cNvSpPr>
+            <a:spLocks noGrp="1" noRot="1" noChangeAspect="1"/>
+          </p:cNvSpPr>
+          <p:nvPr>
+            <p:ph type="sldImg"/>
+          </p:nvPr>
+        </p:nvSpPr>
+        <p:spPr/>
+      </p:sp>
+      <p:sp>
+        <p:nvSpPr>
+          <p:cNvPr id="3" name="Notes Placeholder 2"/>
+          <p:cNvSpPr>
+            <a:spLocks noGrp="1"/>
+          </p:cNvSpPr>
+          <p:nvPr>
+            <p:ph type="body" idx="1"/>
+          </p:nvPr>
+        </p:nvSpPr>
+        <p:spPr/>
+        <p:txBody>
+          <a:bodyPr/>
+          <a:lstStyle/>
+          <a:p>
+            <a:r>
+              <a:rPr lang="en-US" dirty="0"/>
+              <a:t>Робот задел столб, отъехал назад вслепую и потерял положение. В быстром симуляторе этого не было видно. До правки: 4 столкновения, 37,0 очка; пунктир — где робот себя считал. После: 91,1 очка.</a:t>
+            </a:r>
+            <a:endParaRPr lang="en-US" dirty="0"/>
+          </a:p>
+        </p:txBody>
+      </p:sp>
+      <p:sp>
+        <p:nvSpPr>
+          <p:cNvPr id="4" name="Slide Number Placeholder 3"/>
+          <p:cNvSpPr>
+            <a:spLocks noGrp="1"/>
+          </p:cNvSpPr>
+          <p:nvPr>
+            <p:ph type="sldNum" sz="quarter" idx="10"/>
+          </p:nvPr>
+        </p:nvSpPr>
+        <p:spPr/>
+        <p:txBody>
+          <a:bodyPr/>
+          <a:lstStyle/>
+          <a:p>
+            <a:fld id="{F7021451-1387-4CA6-816F-3879F97B5CBC}" type="slidenum">
+              <a:rPr lang="en-US"/>
+              <a:t>9</a:t>
             </a:fld>
             <a:endParaRPr lang="en-US"/>
           </a:p>
@@ -3475,7 +4187,7 @@
         <p:spPr>
           <a:xfrm>
             <a:off x="5596128" y="4828032"/>
-            <a:ext cx="733146" cy="109728"/>
+            <a:ext cx="732895" cy="109728"/>
           </a:xfrm>
           <a:prstGeom prst="rect">
             <a:avLst/>
@@ -3624,7 +4336,7 @@
                   <a:schemeClr val="tx1"/>
                 </a:solidFill>
               </a:rPr>
-              <a:t>Исследователь проверяет другие объяснения и ошибается реже. Счёт почти тот же: 68,1 и 67,5.</a:t>
+              <a:t>Исследователь проверяет другие объяснения и ошибается реже. Счёт почти тот же: 68,4 и 67,5.</a:t>
             </a:r>
             <a:endParaRPr lang="en-US" sz="1100" dirty="0"/>
           </a:p>
@@ -4179,6 +4891,2630 @@
               <a:t>Обнаружение смены грунта: +0,5 [−1,4; 2,4]. Обучение цене грунта: +1,0 [−3,6; 5,4]. Различие не показано.</a:t>
             </a:r>
             <a:endParaRPr lang="en-US" sz="1200" dirty="0"/>
+          </a:p>
+        </p:txBody>
+      </p:sp>
+    </p:spTree>
+  </p:cSld>
+  <p:clrMapOvr>
+    <a:masterClrMapping/>
+  </p:clrMapOvr>
+</p:sld>
+</file>
+
+<file path=ppt/slides/slide2.xml><?xml version="1.0" encoding="utf-8"?>
+<p:sld xmlns:a="http://schemas.openxmlformats.org/drawingml/2006/main" xmlns:r="http://schemas.openxmlformats.org/officeDocument/2006/relationships" xmlns:p="http://schemas.openxmlformats.org/presentationml/2006/main">
+  <p:cSld name="Slide 2">
+    <p:spTree>
+      <p:nvGrpSpPr>
+        <p:cNvPr id="1" name=""/>
+        <p:cNvGrpSpPr/>
+        <p:nvPr/>
+      </p:nvGrpSpPr>
+      <p:grpSpPr>
+        <a:xfrm>
+          <a:off x="0" y="0"/>
+          <a:ext cx="0" cy="0"/>
+          <a:chOff x="0" y="0"/>
+          <a:chExt cx="0" cy="0"/>
+        </a:xfrm>
+      </p:grpSpPr>
+      <p:sp>
+        <p:nvSpPr>
+          <p:cNvPr id="2" name="Text 0"/>
+          <p:cNvSpPr/>
+          <p:nvPr>
+            <p:ph idx="100" type="title" hasCustomPrompt="1"/>
+          </p:nvPr>
+        </p:nvSpPr>
+        <p:spPr>
+          <a:xfrm>
+            <a:off x="548640" y="384048"/>
+            <a:ext cx="11091672" cy="685800"/>
+          </a:xfrm>
+          <a:prstGeom prst="rect">
+            <a:avLst/>
+          </a:prstGeom>
+          <a:noFill/>
+          <a:ln/>
+        </p:spPr>
+        <p:txBody>
+          <a:bodyPr wrap="square" lIns="0" tIns="0" rIns="0" bIns="0" rtlCol="0" anchor="ctr"/>
+          <a:lstStyle/>
+          <a:p>
+            <a:pPr algn="l" indent="0" marL="0">
+              <a:buNone/>
+            </a:pPr>
+            <a:r>
+              <a:rPr lang="en-US" sz="3200" b="1" dirty="0">
+                <a:solidFill>
+                  <a:schemeClr val="tx1"/>
+                </a:solidFill>
+              </a:rPr>
+              <a:t>Опыт 1. Агент против готового маршрута</a:t>
+            </a:r>
+            <a:endParaRPr lang="en-US" sz="3200" dirty="0"/>
+          </a:p>
+        </p:txBody>
+      </p:sp>
+      <p:sp>
+        <p:nvSpPr>
+          <p:cNvPr id="3" name="Text 0"/>
+          <p:cNvSpPr/>
+          <p:nvPr>
+            <p:ph idx="101" type="body" hasCustomPrompt="1"/>
+          </p:nvPr>
+        </p:nvSpPr>
+        <p:spPr>
+          <a:xfrm>
+            <a:off x="548640" y="1097280"/>
+            <a:ext cx="11091672" cy="384048"/>
+          </a:xfrm>
+          <a:prstGeom prst="rect">
+            <a:avLst/>
+          </a:prstGeom>
+          <a:noFill/>
+          <a:ln/>
+        </p:spPr>
+        <p:txBody>
+          <a:bodyPr wrap="square" lIns="0" tIns="0" rIns="0" bIns="0" rtlCol="0" anchor="ctr"/>
+          <a:lstStyle/>
+          <a:p>
+            <a:pPr algn="l" indent="0" marL="0">
+              <a:buNone/>
+            </a:pPr>
+            <a:r>
+              <a:rPr lang="en-US" sz="1600" dirty="0">
+                <a:solidFill>
+                  <a:schemeClr val="accent5"/>
+                </a:solidFill>
+              </a:rPr>
+              <a:t>Один сценарий: слева робот едет по готовому маршруту, справа перестраивает его по измерениям</a:t>
+            </a:r>
+            <a:endParaRPr lang="en-US" sz="1600" dirty="0"/>
+          </a:p>
+        </p:txBody>
+      </p:sp>
+      <p:pic>
+        <p:nvPicPr>
+          <p:cNvPr id="5" name="Image 0" descr="Один сценарий: слева робот едет по готовому маршруту, справа перестраивает его по измерениям">    </p:cNvPr>
+          <p:cNvPicPr>
+            <a:picLocks noChangeAspect="1"/>
+          </p:cNvPicPr>
+          <p:nvPr/>
+        </p:nvPicPr>
+        <p:blipFill>
+          <a:blip r:embed="rId1"/>
+          <a:stretch>
+            <a:fillRect/>
+          </a:stretch>
+        </p:blipFill>
+        <p:spPr>
+          <a:xfrm>
+            <a:off x="548640" y="1691640"/>
+            <a:ext cx="7671661" cy="4526280"/>
+          </a:xfrm>
+          <a:prstGeom prst="rect">
+            <a:avLst/>
+          </a:prstGeom>
+        </p:spPr>
+      </p:pic>
+      <p:sp>
+        <p:nvSpPr>
+          <p:cNvPr id="6" name="Text 2"/>
+          <p:cNvSpPr txBox="1"/>
+          <p:nvPr/>
+        </p:nvSpPr>
+        <p:spPr>
+          <a:xfrm>
+            <a:off x="8549640" y="1691640"/>
+            <a:ext cx="3090672" cy="566928"/>
+          </a:xfrm>
+          <a:prstGeom prst="rect">
+            <a:avLst/>
+          </a:prstGeom>
+          <a:noFill/>
+          <a:ln/>
+        </p:spPr>
+        <p:txBody>
+          <a:bodyPr wrap="square" lIns="0" tIns="0" rIns="0" bIns="0" rtlCol="0" anchor="ctr"/>
+          <a:lstStyle/>
+          <a:p>
+            <a:pPr algn="l" indent="0" marL="0">
+              <a:buNone/>
+            </a:pPr>
+            <a:r>
+              <a:rPr lang="en-US" sz="3400" b="1" dirty="0">
+                <a:solidFill>
+                  <a:schemeClr val="accent1"/>
+                </a:solidFill>
+              </a:rPr>
+              <a:t>+13,3 очка</a:t>
+            </a:r>
+            <a:endParaRPr lang="en-US" sz="3400" dirty="0"/>
+          </a:p>
+        </p:txBody>
+      </p:sp>
+      <p:sp>
+        <p:nvSpPr>
+          <p:cNvPr id="7" name="Text 3"/>
+          <p:cNvSpPr txBox="1"/>
+          <p:nvPr/>
+        </p:nvSpPr>
+        <p:spPr>
+          <a:xfrm>
+            <a:off x="8549640" y="2295144"/>
+            <a:ext cx="3090672" cy="457200"/>
+          </a:xfrm>
+          <a:prstGeom prst="rect">
+            <a:avLst/>
+          </a:prstGeom>
+          <a:noFill/>
+          <a:ln/>
+        </p:spPr>
+        <p:txBody>
+          <a:bodyPr wrap="square" lIns="0" tIns="0" rIns="0" bIns="0" rtlCol="0" anchor="t"/>
+          <a:lstStyle/>
+          <a:p>
+            <a:pPr algn="l" indent="0" marL="0">
+              <a:buNone/>
+            </a:pPr>
+            <a:r>
+              <a:rPr lang="en-US" sz="1200" dirty="0">
+                <a:solidFill>
+                  <a:schemeClr val="accent5"/>
+                </a:solidFill>
+              </a:rPr>
+              <a:t>[7,4; 19,0] · 240 прогонов, трудный уровень</a:t>
+            </a:r>
+            <a:endParaRPr lang="en-US" sz="1200" dirty="0"/>
+          </a:p>
+        </p:txBody>
+      </p:sp>
+      <p:sp>
+        <p:nvSpPr>
+          <p:cNvPr id="8" name="Text 4"/>
+          <p:cNvSpPr txBox="1"/>
+          <p:nvPr/>
+        </p:nvSpPr>
+        <p:spPr>
+          <a:xfrm>
+            <a:off x="8549640" y="2880360"/>
+            <a:ext cx="3090672" cy="1463040"/>
+          </a:xfrm>
+          <a:prstGeom prst="rect">
+            <a:avLst/>
+          </a:prstGeom>
+          <a:noFill/>
+          <a:ln/>
+        </p:spPr>
+        <p:txBody>
+          <a:bodyPr wrap="square" lIns="0" tIns="0" rIns="0" bIns="0" rtlCol="0" anchor="t"/>
+          <a:lstStyle/>
+          <a:p>
+            <a:pPr algn="l" indent="0" marL="0">
+              <a:buNone/>
+            </a:pPr>
+            <a:r>
+              <a:rPr lang="en-US" sz="1500" dirty="0">
+                <a:solidFill>
+                  <a:schemeClr val="tx1"/>
+                </a:solidFill>
+              </a:rPr>
+              <a:t>Собирает 81% образцов вместо 60%. Возврат на базу одинаковый — 95%.</a:t>
+            </a:r>
+            <a:endParaRPr lang="en-US" sz="1500" dirty="0"/>
+          </a:p>
+        </p:txBody>
+      </p:sp>
+      <p:sp>
+        <p:nvSpPr>
+          <p:cNvPr id="9" name="Shape 5"/>
+          <p:cNvSpPr/>
+          <p:nvPr/>
+        </p:nvSpPr>
+        <p:spPr>
+          <a:xfrm>
+            <a:off x="8549640" y="4480560"/>
+            <a:ext cx="3090672" cy="0"/>
+          </a:xfrm>
+          <a:prstGeom prst="line">
+            <a:avLst/>
+          </a:prstGeom>
+          <a:noFill/>
+          <a:ln w="9525">
+            <a:solidFill>
+              <a:srgbClr val="D5D9DE"/>
+            </a:solidFill>
+            <a:prstDash val="solid"/>
+          </a:ln>
+        </p:spPr>
+      </p:sp>
+      <p:sp>
+        <p:nvSpPr>
+          <p:cNvPr id="10" name="Text 6"/>
+          <p:cNvSpPr txBox="1"/>
+          <p:nvPr/>
+        </p:nvSpPr>
+        <p:spPr>
+          <a:xfrm>
+            <a:off x="8549640" y="4572000"/>
+            <a:ext cx="3090672" cy="256032"/>
+          </a:xfrm>
+          <a:prstGeom prst="rect">
+            <a:avLst/>
+          </a:prstGeom>
+          <a:noFill/>
+          <a:ln/>
+        </p:spPr>
+        <p:txBody>
+          <a:bodyPr wrap="square" lIns="0" tIns="0" rIns="0" bIns="0" rtlCol="0" anchor="t"/>
+          <a:lstStyle/>
+          <a:p>
+            <a:pPr algn="l" indent="0" marL="0">
+              <a:buNone/>
+            </a:pPr>
+            <a:r>
+              <a:rPr lang="en-US" sz="1100" b="1" dirty="0">
+                <a:solidFill>
+                  <a:schemeClr val="accent5"/>
+                </a:solidFill>
+              </a:rPr>
+              <a:t>В ролике</a:t>
+            </a:r>
+            <a:endParaRPr lang="en-US" sz="1100" dirty="0"/>
+          </a:p>
+        </p:txBody>
+      </p:sp>
+      <p:sp>
+        <p:nvSpPr>
+          <p:cNvPr id="11" name="Text 7"/>
+          <p:cNvSpPr txBox="1"/>
+          <p:nvPr/>
+        </p:nvSpPr>
+        <p:spPr>
+          <a:xfrm>
+            <a:off x="8549640" y="4846320"/>
+            <a:ext cx="3090672" cy="1371600"/>
+          </a:xfrm>
+          <a:prstGeom prst="rect">
+            <a:avLst/>
+          </a:prstGeom>
+          <a:noFill/>
+          <a:ln/>
+        </p:spPr>
+        <p:txBody>
+          <a:bodyPr wrap="square" lIns="0" tIns="0" rIns="0" bIns="0" rtlCol="0" anchor="t"/>
+          <a:lstStyle/>
+          <a:p>
+            <a:pPr algn="l" indent="0" marL="0">
+              <a:buNone/>
+            </a:pPr>
+            <a:r>
+              <a:rPr lang="en-US" sz="1250" dirty="0">
+                <a:solidFill>
+                  <a:schemeClr val="tx1"/>
+                </a:solidFill>
+              </a:rPr>
+              <a:t>В этом прогоне: 61,1 очка против 75,1, собрано 4 и 6 образцов из 7.</a:t>
+            </a:r>
+            <a:endParaRPr lang="en-US" sz="1250" dirty="0"/>
+          </a:p>
+        </p:txBody>
+      </p:sp>
+    </p:spTree>
+  </p:cSld>
+  <p:clrMapOvr>
+    <a:masterClrMapping/>
+  </p:clrMapOvr>
+</p:sld>
+</file>
+
+<file path=ppt/slides/slide3.xml><?xml version="1.0" encoding="utf-8"?>
+<p:sld xmlns:a="http://schemas.openxmlformats.org/drawingml/2006/main" xmlns:r="http://schemas.openxmlformats.org/officeDocument/2006/relationships" xmlns:p="http://schemas.openxmlformats.org/presentationml/2006/main">
+  <p:cSld name="Slide 3">
+    <p:spTree>
+      <p:nvGrpSpPr>
+        <p:cNvPr id="1" name=""/>
+        <p:cNvGrpSpPr/>
+        <p:nvPr/>
+      </p:nvGrpSpPr>
+      <p:grpSpPr>
+        <a:xfrm>
+          <a:off x="0" y="0"/>
+          <a:ext cx="0" cy="0"/>
+          <a:chOff x="0" y="0"/>
+          <a:chExt cx="0" cy="0"/>
+        </a:xfrm>
+      </p:grpSpPr>
+      <p:sp>
+        <p:nvSpPr>
+          <p:cNvPr id="2" name="Text 0"/>
+          <p:cNvSpPr/>
+          <p:nvPr>
+            <p:ph idx="100" type="title" hasCustomPrompt="1"/>
+          </p:nvPr>
+        </p:nvSpPr>
+        <p:spPr>
+          <a:xfrm>
+            <a:off x="548640" y="384048"/>
+            <a:ext cx="11091672" cy="685800"/>
+          </a:xfrm>
+          <a:prstGeom prst="rect">
+            <a:avLst/>
+          </a:prstGeom>
+          <a:noFill/>
+          <a:ln/>
+        </p:spPr>
+        <p:txBody>
+          <a:bodyPr wrap="square" lIns="0" tIns="0" rIns="0" bIns="0" rtlCol="0" anchor="ctr"/>
+          <a:lstStyle/>
+          <a:p>
+            <a:pPr algn="l" indent="0" marL="0">
+              <a:buNone/>
+            </a:pPr>
+            <a:r>
+              <a:rPr lang="en-US" sz="3200" b="1" dirty="0">
+                <a:solidFill>
+                  <a:schemeClr val="tx1"/>
+                </a:solidFill>
+              </a:rPr>
+              <a:t>Опыт 2. Как искать образцы</a:t>
+            </a:r>
+            <a:endParaRPr lang="en-US" sz="3200" dirty="0"/>
+          </a:p>
+        </p:txBody>
+      </p:sp>
+      <p:sp>
+        <p:nvSpPr>
+          <p:cNvPr id="3" name="Text 0"/>
+          <p:cNvSpPr/>
+          <p:nvPr>
+            <p:ph idx="101" type="body" hasCustomPrompt="1"/>
+          </p:nvPr>
+        </p:nvSpPr>
+        <p:spPr>
+          <a:xfrm>
+            <a:off x="548640" y="1097280"/>
+            <a:ext cx="11091672" cy="384048"/>
+          </a:xfrm>
+          <a:prstGeom prst="rect">
+            <a:avLst/>
+          </a:prstGeom>
+          <a:noFill/>
+          <a:ln/>
+        </p:spPr>
+        <p:txBody>
+          <a:bodyPr wrap="square" lIns="0" tIns="0" rIns="0" bIns="0" rtlCol="0" anchor="ctr"/>
+          <a:lstStyle/>
+          <a:p>
+            <a:pPr algn="l" indent="0" marL="0">
+              <a:buNone/>
+            </a:pPr>
+            <a:r>
+              <a:rPr lang="en-US" sz="1600" dirty="0">
+                <a:solidFill>
+                  <a:schemeClr val="accent5"/>
+                </a:solidFill>
+              </a:rPr>
+              <a:t>Один сценарий среднего уровня, три способа искать по датчику без направления</a:t>
+            </a:r>
+            <a:endParaRPr lang="en-US" sz="1600" dirty="0"/>
+          </a:p>
+        </p:txBody>
+      </p:sp>
+      <p:pic>
+        <p:nvPicPr>
+          <p:cNvPr id="5" name="Image 0" descr="Один сценарий среднего уровня, три способа искать по датчику без направления">    </p:cNvPr>
+          <p:cNvPicPr>
+            <a:picLocks noChangeAspect="1"/>
+          </p:cNvPicPr>
+          <p:nvPr/>
+        </p:nvPicPr>
+        <p:blipFill>
+          <a:blip r:embed="rId1"/>
+          <a:stretch>
+            <a:fillRect/>
+          </a:stretch>
+        </p:blipFill>
+        <p:spPr>
+          <a:xfrm>
+            <a:off x="548640" y="1691640"/>
+            <a:ext cx="7726680" cy="3386861"/>
+          </a:xfrm>
+          <a:prstGeom prst="rect">
+            <a:avLst/>
+          </a:prstGeom>
+        </p:spPr>
+      </p:pic>
+      <p:sp>
+        <p:nvSpPr>
+          <p:cNvPr id="6" name="Text 2"/>
+          <p:cNvSpPr txBox="1"/>
+          <p:nvPr/>
+        </p:nvSpPr>
+        <p:spPr>
+          <a:xfrm>
+            <a:off x="8549640" y="1691640"/>
+            <a:ext cx="3090672" cy="566928"/>
+          </a:xfrm>
+          <a:prstGeom prst="rect">
+            <a:avLst/>
+          </a:prstGeom>
+          <a:noFill/>
+          <a:ln/>
+        </p:spPr>
+        <p:txBody>
+          <a:bodyPr wrap="square" lIns="0" tIns="0" rIns="0" bIns="0" rtlCol="0" anchor="ctr"/>
+          <a:lstStyle/>
+          <a:p>
+            <a:pPr algn="l" indent="0" marL="0">
+              <a:buNone/>
+            </a:pPr>
+            <a:r>
+              <a:rPr lang="en-US" sz="3400" b="1" dirty="0">
+                <a:solidFill>
+                  <a:schemeClr val="accent1"/>
+                </a:solidFill>
+              </a:rPr>
+              <a:t>+17,5 п. п.</a:t>
+            </a:r>
+            <a:endParaRPr lang="en-US" sz="3400" dirty="0"/>
+          </a:p>
+        </p:txBody>
+      </p:sp>
+      <p:sp>
+        <p:nvSpPr>
+          <p:cNvPr id="7" name="Text 3"/>
+          <p:cNvSpPr txBox="1"/>
+          <p:nvPr/>
+        </p:nvSpPr>
+        <p:spPr>
+          <a:xfrm>
+            <a:off x="8549640" y="2295144"/>
+            <a:ext cx="3090672" cy="457200"/>
+          </a:xfrm>
+          <a:prstGeom prst="rect">
+            <a:avLst/>
+          </a:prstGeom>
+          <a:noFill/>
+          <a:ln/>
+        </p:spPr>
+        <p:txBody>
+          <a:bodyPr wrap="square" lIns="0" tIns="0" rIns="0" bIns="0" rtlCol="0" anchor="t"/>
+          <a:lstStyle/>
+          <a:p>
+            <a:pPr algn="l" indent="0" marL="0">
+              <a:buNone/>
+            </a:pPr>
+            <a:r>
+              <a:rPr lang="en-US" sz="1200" dirty="0">
+                <a:solidFill>
+                  <a:schemeClr val="accent5"/>
+                </a:solidFill>
+              </a:rPr>
+              <a:t>[13; 22] к подъёму по сигналу · 400 прогонов</a:t>
+            </a:r>
+            <a:endParaRPr lang="en-US" sz="1200" dirty="0"/>
+          </a:p>
+        </p:txBody>
+      </p:sp>
+      <p:sp>
+        <p:nvSpPr>
+          <p:cNvPr id="8" name="Text 4"/>
+          <p:cNvSpPr txBox="1"/>
+          <p:nvPr/>
+        </p:nvSpPr>
+        <p:spPr>
+          <a:xfrm>
+            <a:off x="8549640" y="2880360"/>
+            <a:ext cx="3090672" cy="1463040"/>
+          </a:xfrm>
+          <a:prstGeom prst="rect">
+            <a:avLst/>
+          </a:prstGeom>
+          <a:noFill/>
+          <a:ln/>
+        </p:spPr>
+        <p:txBody>
+          <a:bodyPr wrap="square" lIns="0" tIns="0" rIns="0" bIns="0" rtlCol="0" anchor="t"/>
+          <a:lstStyle/>
+          <a:p>
+            <a:pPr algn="l" indent="0" marL="0">
+              <a:buNone/>
+            </a:pPr>
+            <a:r>
+              <a:rPr lang="en-US" sz="1500" dirty="0">
+                <a:solidFill>
+                  <a:schemeClr val="tx1"/>
+                </a:solidFill>
+              </a:rPr>
+              <a:t>Карта вероятностей находит почти всё и тратит на 7 единиц заряда меньше. Спираль — 67,5%.</a:t>
+            </a:r>
+            <a:endParaRPr lang="en-US" sz="1500" dirty="0"/>
+          </a:p>
+        </p:txBody>
+      </p:sp>
+      <p:sp>
+        <p:nvSpPr>
+          <p:cNvPr id="9" name="Shape 5"/>
+          <p:cNvSpPr/>
+          <p:nvPr/>
+        </p:nvSpPr>
+        <p:spPr>
+          <a:xfrm>
+            <a:off x="8549640" y="4480560"/>
+            <a:ext cx="3090672" cy="0"/>
+          </a:xfrm>
+          <a:prstGeom prst="line">
+            <a:avLst/>
+          </a:prstGeom>
+          <a:noFill/>
+          <a:ln w="9525">
+            <a:solidFill>
+              <a:srgbClr val="D5D9DE"/>
+            </a:solidFill>
+            <a:prstDash val="solid"/>
+          </a:ln>
+        </p:spPr>
+      </p:sp>
+      <p:sp>
+        <p:nvSpPr>
+          <p:cNvPr id="10" name="Text 6"/>
+          <p:cNvSpPr txBox="1"/>
+          <p:nvPr/>
+        </p:nvSpPr>
+        <p:spPr>
+          <a:xfrm>
+            <a:off x="8549640" y="4572000"/>
+            <a:ext cx="3090672" cy="256032"/>
+          </a:xfrm>
+          <a:prstGeom prst="rect">
+            <a:avLst/>
+          </a:prstGeom>
+          <a:noFill/>
+          <a:ln/>
+        </p:spPr>
+        <p:txBody>
+          <a:bodyPr wrap="square" lIns="0" tIns="0" rIns="0" bIns="0" rtlCol="0" anchor="t"/>
+          <a:lstStyle/>
+          <a:p>
+            <a:pPr algn="l" indent="0" marL="0">
+              <a:buNone/>
+            </a:pPr>
+            <a:r>
+              <a:rPr lang="en-US" sz="1100" b="1" dirty="0">
+                <a:solidFill>
+                  <a:schemeClr val="accent5"/>
+                </a:solidFill>
+              </a:rPr>
+              <a:t>В ролике</a:t>
+            </a:r>
+            <a:endParaRPr lang="en-US" sz="1100" dirty="0"/>
+          </a:p>
+        </p:txBody>
+      </p:sp>
+      <p:sp>
+        <p:nvSpPr>
+          <p:cNvPr id="11" name="Text 7"/>
+          <p:cNvSpPr txBox="1"/>
+          <p:nvPr/>
+        </p:nvSpPr>
+        <p:spPr>
+          <a:xfrm>
+            <a:off x="8549640" y="4846320"/>
+            <a:ext cx="3090672" cy="1371600"/>
+          </a:xfrm>
+          <a:prstGeom prst="rect">
+            <a:avLst/>
+          </a:prstGeom>
+          <a:noFill/>
+          <a:ln/>
+        </p:spPr>
+        <p:txBody>
+          <a:bodyPr wrap="square" lIns="0" tIns="0" rIns="0" bIns="0" rtlCol="0" anchor="t"/>
+          <a:lstStyle/>
+          <a:p>
+            <a:pPr algn="l" indent="0" marL="0">
+              <a:buNone/>
+            </a:pPr>
+            <a:r>
+              <a:rPr lang="en-US" sz="1250" dirty="0">
+                <a:solidFill>
+                  <a:schemeClr val="tx1"/>
+                </a:solidFill>
+              </a:rPr>
+              <a:t>В этом прогоне спираль собрала 3 образца из 5, подъём по сигналу — 4, карта вероятностей — все 5.</a:t>
+            </a:r>
+            <a:endParaRPr lang="en-US" sz="1250" dirty="0"/>
+          </a:p>
+        </p:txBody>
+      </p:sp>
+    </p:spTree>
+  </p:cSld>
+  <p:clrMapOvr>
+    <a:masterClrMapping/>
+  </p:clrMapOvr>
+</p:sld>
+</file>
+
+<file path=ppt/slides/slide4.xml><?xml version="1.0" encoding="utf-8"?>
+<p:sld xmlns:a="http://schemas.openxmlformats.org/drawingml/2006/main" xmlns:r="http://schemas.openxmlformats.org/officeDocument/2006/relationships" xmlns:p="http://schemas.openxmlformats.org/presentationml/2006/main">
+  <p:cSld name="Slide 4">
+    <p:spTree>
+      <p:nvGrpSpPr>
+        <p:cNvPr id="1" name=""/>
+        <p:cNvGrpSpPr/>
+        <p:nvPr/>
+      </p:nvGrpSpPr>
+      <p:grpSpPr>
+        <a:xfrm>
+          <a:off x="0" y="0"/>
+          <a:ext cx="0" cy="0"/>
+          <a:chOff x="0" y="0"/>
+          <a:chExt cx="0" cy="0"/>
+        </a:xfrm>
+      </p:grpSpPr>
+      <p:sp>
+        <p:nvSpPr>
+          <p:cNvPr id="2" name="Text 0"/>
+          <p:cNvSpPr/>
+          <p:nvPr>
+            <p:ph idx="100" type="title" hasCustomPrompt="1"/>
+          </p:nvPr>
+        </p:nvSpPr>
+        <p:spPr>
+          <a:xfrm>
+            <a:off x="548640" y="384048"/>
+            <a:ext cx="11091672" cy="685800"/>
+          </a:xfrm>
+          <a:prstGeom prst="rect">
+            <a:avLst/>
+          </a:prstGeom>
+          <a:noFill/>
+          <a:ln/>
+        </p:spPr>
+        <p:txBody>
+          <a:bodyPr wrap="square" lIns="0" tIns="0" rIns="0" bIns="0" rtlCol="0" anchor="ctr"/>
+          <a:lstStyle/>
+          <a:p>
+            <a:pPr algn="l" indent="0" marL="0">
+              <a:buNone/>
+            </a:pPr>
+            <a:r>
+              <a:rPr lang="en-US" sz="3200" b="1" dirty="0">
+                <a:solidFill>
+                  <a:schemeClr val="tx1"/>
+                </a:solidFill>
+              </a:rPr>
+              <a:t>Опыт 3. Сбой датчика: ехать или ждать</a:t>
+            </a:r>
+            <a:endParaRPr lang="en-US" sz="3200" dirty="0"/>
+          </a:p>
+        </p:txBody>
+      </p:sp>
+      <p:sp>
+        <p:nvSpPr>
+          <p:cNvPr id="3" name="Text 0"/>
+          <p:cNvSpPr/>
+          <p:nvPr>
+            <p:ph idx="101" type="body" hasCustomPrompt="1"/>
+          </p:nvPr>
+        </p:nvSpPr>
+        <p:spPr>
+          <a:xfrm>
+            <a:off x="548640" y="1097280"/>
+            <a:ext cx="11091672" cy="384048"/>
+          </a:xfrm>
+          <a:prstGeom prst="rect">
+            <a:avLst/>
+          </a:prstGeom>
+          <a:noFill/>
+          <a:ln/>
+        </p:spPr>
+        <p:txBody>
+          <a:bodyPr wrap="square" lIns="0" tIns="0" rIns="0" bIns="0" rtlCol="0" anchor="ctr"/>
+          <a:lstStyle/>
+          <a:p>
+            <a:pPr algn="l" indent="0" marL="0">
+              <a:buNone/>
+            </a:pPr>
+            <a:r>
+              <a:rPr lang="en-US" sz="1600" dirty="0">
+                <a:solidFill>
+                  <a:schemeClr val="accent5"/>
+                </a:solidFill>
+              </a:rPr>
+              <a:t>Датчик образцов выходит из строя на полминуты: прежний агент едет дальше, новый стоит и ждёт</a:t>
+            </a:r>
+            <a:endParaRPr lang="en-US" sz="1600" dirty="0"/>
+          </a:p>
+        </p:txBody>
+      </p:sp>
+      <p:pic>
+        <p:nvPicPr>
+          <p:cNvPr id="5" name="Image 0" descr="Датчик образцов выходит из строя на полминуты: прежний агент едет дальше, новый стоит и ждёт">    </p:cNvPr>
+          <p:cNvPicPr>
+            <a:picLocks noChangeAspect="1"/>
+          </p:cNvPicPr>
+          <p:nvPr/>
+        </p:nvPicPr>
+        <p:blipFill>
+          <a:blip r:embed="rId1"/>
+          <a:stretch>
+            <a:fillRect/>
+          </a:stretch>
+        </p:blipFill>
+        <p:spPr>
+          <a:xfrm>
+            <a:off x="548640" y="1691640"/>
+            <a:ext cx="7671661" cy="4526280"/>
+          </a:xfrm>
+          <a:prstGeom prst="rect">
+            <a:avLst/>
+          </a:prstGeom>
+        </p:spPr>
+      </p:pic>
+      <p:sp>
+        <p:nvSpPr>
+          <p:cNvPr id="6" name="Text 2"/>
+          <p:cNvSpPr txBox="1"/>
+          <p:nvPr/>
+        </p:nvSpPr>
+        <p:spPr>
+          <a:xfrm>
+            <a:off x="8549640" y="1691640"/>
+            <a:ext cx="3090672" cy="566928"/>
+          </a:xfrm>
+          <a:prstGeom prst="rect">
+            <a:avLst/>
+          </a:prstGeom>
+          <a:noFill/>
+          <a:ln/>
+        </p:spPr>
+        <p:txBody>
+          <a:bodyPr wrap="square" lIns="0" tIns="0" rIns="0" bIns="0" rtlCol="0" anchor="ctr"/>
+          <a:lstStyle/>
+          <a:p>
+            <a:pPr algn="l" indent="0" marL="0">
+              <a:buNone/>
+            </a:pPr>
+            <a:r>
+              <a:rPr lang="en-US" sz="3400" b="1" dirty="0">
+                <a:solidFill>
+                  <a:schemeClr val="accent1"/>
+                </a:solidFill>
+              </a:rPr>
+              <a:t>+6,4 очка</a:t>
+            </a:r>
+            <a:endParaRPr lang="en-US" sz="3400" dirty="0"/>
+          </a:p>
+        </p:txBody>
+      </p:sp>
+      <p:sp>
+        <p:nvSpPr>
+          <p:cNvPr id="7" name="Text 3"/>
+          <p:cNvSpPr txBox="1"/>
+          <p:nvPr/>
+        </p:nvSpPr>
+        <p:spPr>
+          <a:xfrm>
+            <a:off x="8549640" y="2295144"/>
+            <a:ext cx="3090672" cy="457200"/>
+          </a:xfrm>
+          <a:prstGeom prst="rect">
+            <a:avLst/>
+          </a:prstGeom>
+          <a:noFill/>
+          <a:ln/>
+        </p:spPr>
+        <p:txBody>
+          <a:bodyPr wrap="square" lIns="0" tIns="0" rIns="0" bIns="0" rtlCol="0" anchor="t"/>
+          <a:lstStyle/>
+          <a:p>
+            <a:pPr algn="l" indent="0" marL="0">
+              <a:buNone/>
+            </a:pPr>
+            <a:r>
+              <a:rPr lang="en-US" sz="1200" dirty="0">
+                <a:solidFill>
+                  <a:schemeClr val="accent5"/>
+                </a:solidFill>
+              </a:rPr>
+              <a:t>[2,9; 9,8] · 80 прогонов, трудный уровень</a:t>
+            </a:r>
+            <a:endParaRPr lang="en-US" sz="1200" dirty="0"/>
+          </a:p>
+        </p:txBody>
+      </p:sp>
+      <p:sp>
+        <p:nvSpPr>
+          <p:cNvPr id="8" name="Text 4"/>
+          <p:cNvSpPr txBox="1"/>
+          <p:nvPr/>
+        </p:nvSpPr>
+        <p:spPr>
+          <a:xfrm>
+            <a:off x="8549640" y="2880360"/>
+            <a:ext cx="3090672" cy="1463040"/>
+          </a:xfrm>
+          <a:prstGeom prst="rect">
+            <a:avLst/>
+          </a:prstGeom>
+          <a:noFill/>
+          <a:ln/>
+        </p:spPr>
+        <p:txBody>
+          <a:bodyPr wrap="square" lIns="0" tIns="0" rIns="0" bIns="0" rtlCol="0" anchor="t"/>
+          <a:lstStyle/>
+          <a:p>
+            <a:pPr algn="l" indent="0" marL="0">
+              <a:buNone/>
+            </a:pPr>
+            <a:r>
+              <a:rPr lang="en-US" sz="1500" dirty="0">
+                <a:solidFill>
+                  <a:schemeClr val="tx1"/>
+                </a:solidFill>
+              </a:rPr>
+              <a:t>Заметить сбой и постоять выгоднее, чем ехать по ложным показаниям.</a:t>
+            </a:r>
+            <a:endParaRPr lang="en-US" sz="1500" dirty="0"/>
+          </a:p>
+        </p:txBody>
+      </p:sp>
+      <p:sp>
+        <p:nvSpPr>
+          <p:cNvPr id="9" name="Shape 5"/>
+          <p:cNvSpPr/>
+          <p:nvPr/>
+        </p:nvSpPr>
+        <p:spPr>
+          <a:xfrm>
+            <a:off x="8549640" y="4480560"/>
+            <a:ext cx="3090672" cy="0"/>
+          </a:xfrm>
+          <a:prstGeom prst="line">
+            <a:avLst/>
+          </a:prstGeom>
+          <a:noFill/>
+          <a:ln w="9525">
+            <a:solidFill>
+              <a:srgbClr val="D5D9DE"/>
+            </a:solidFill>
+            <a:prstDash val="solid"/>
+          </a:ln>
+        </p:spPr>
+      </p:sp>
+      <p:sp>
+        <p:nvSpPr>
+          <p:cNvPr id="10" name="Text 6"/>
+          <p:cNvSpPr txBox="1"/>
+          <p:nvPr/>
+        </p:nvSpPr>
+        <p:spPr>
+          <a:xfrm>
+            <a:off x="8549640" y="4572000"/>
+            <a:ext cx="3090672" cy="256032"/>
+          </a:xfrm>
+          <a:prstGeom prst="rect">
+            <a:avLst/>
+          </a:prstGeom>
+          <a:noFill/>
+          <a:ln/>
+        </p:spPr>
+        <p:txBody>
+          <a:bodyPr wrap="square" lIns="0" tIns="0" rIns="0" bIns="0" rtlCol="0" anchor="t"/>
+          <a:lstStyle/>
+          <a:p>
+            <a:pPr algn="l" indent="0" marL="0">
+              <a:buNone/>
+            </a:pPr>
+            <a:r>
+              <a:rPr lang="en-US" sz="1100" b="1" dirty="0">
+                <a:solidFill>
+                  <a:schemeClr val="accent5"/>
+                </a:solidFill>
+              </a:rPr>
+              <a:t>В ролике</a:t>
+            </a:r>
+            <a:endParaRPr lang="en-US" sz="1100" dirty="0"/>
+          </a:p>
+        </p:txBody>
+      </p:sp>
+      <p:sp>
+        <p:nvSpPr>
+          <p:cNvPr id="11" name="Text 7"/>
+          <p:cNvSpPr txBox="1"/>
+          <p:nvPr/>
+        </p:nvSpPr>
+        <p:spPr>
+          <a:xfrm>
+            <a:off x="8549640" y="4846320"/>
+            <a:ext cx="3090672" cy="1371600"/>
+          </a:xfrm>
+          <a:prstGeom prst="rect">
+            <a:avLst/>
+          </a:prstGeom>
+          <a:noFill/>
+          <a:ln/>
+        </p:spPr>
+        <p:txBody>
+          <a:bodyPr wrap="square" lIns="0" tIns="0" rIns="0" bIns="0" rtlCol="0" anchor="t"/>
+          <a:lstStyle/>
+          <a:p>
+            <a:pPr algn="l" indent="0" marL="0">
+              <a:buNone/>
+            </a:pPr>
+            <a:r>
+              <a:rPr lang="en-US" sz="1250" dirty="0">
+                <a:solidFill>
+                  <a:schemeClr val="tx1"/>
+                </a:solidFill>
+              </a:rPr>
+              <a:t>Чёрным — путь за время сбоя, жёлтое кольцо — робот ждёт. В этом прогоне: 80,4 очка против 90,6.</a:t>
+            </a:r>
+            <a:endParaRPr lang="en-US" sz="1250" dirty="0"/>
+          </a:p>
+        </p:txBody>
+      </p:sp>
+    </p:spTree>
+  </p:cSld>
+  <p:clrMapOvr>
+    <a:masterClrMapping/>
+  </p:clrMapOvr>
+</p:sld>
+</file>
+
+<file path=ppt/slides/slide5.xml><?xml version="1.0" encoding="utf-8"?>
+<p:sld xmlns:a="http://schemas.openxmlformats.org/drawingml/2006/main" xmlns:r="http://schemas.openxmlformats.org/officeDocument/2006/relationships" xmlns:p="http://schemas.openxmlformats.org/presentationml/2006/main">
+  <p:cSld name="Slide 5">
+    <p:spTree>
+      <p:nvGrpSpPr>
+        <p:cNvPr id="1" name=""/>
+        <p:cNvGrpSpPr/>
+        <p:nvPr/>
+      </p:nvGrpSpPr>
+      <p:grpSpPr>
+        <a:xfrm>
+          <a:off x="0" y="0"/>
+          <a:ext cx="0" cy="0"/>
+          <a:chOff x="0" y="0"/>
+          <a:chExt cx="0" cy="0"/>
+        </a:xfrm>
+      </p:grpSpPr>
+      <p:sp>
+        <p:nvSpPr>
+          <p:cNvPr id="2" name="Text 0"/>
+          <p:cNvSpPr/>
+          <p:nvPr>
+            <p:ph idx="100" type="title" hasCustomPrompt="1"/>
+          </p:nvPr>
+        </p:nvSpPr>
+        <p:spPr>
+          <a:xfrm>
+            <a:off x="548640" y="384048"/>
+            <a:ext cx="11091672" cy="685800"/>
+          </a:xfrm>
+          <a:prstGeom prst="rect">
+            <a:avLst/>
+          </a:prstGeom>
+          <a:noFill/>
+          <a:ln/>
+        </p:spPr>
+        <p:txBody>
+          <a:bodyPr wrap="square" lIns="0" tIns="0" rIns="0" bIns="0" rtlCol="0" anchor="ctr"/>
+          <a:lstStyle/>
+          <a:p>
+            <a:pPr algn="l" indent="0" marL="0">
+              <a:buNone/>
+            </a:pPr>
+            <a:r>
+              <a:rPr lang="en-US" sz="3200" b="1" dirty="0">
+                <a:solidFill>
+                  <a:schemeClr val="tx1"/>
+                </a:solidFill>
+              </a:rPr>
+              <a:t>Опыт 4. Миссия, заданная словами</a:t>
+            </a:r>
+            <a:endParaRPr lang="en-US" sz="3200" dirty="0"/>
+          </a:p>
+        </p:txBody>
+      </p:sp>
+      <p:sp>
+        <p:nvSpPr>
+          <p:cNvPr id="3" name="Text 0"/>
+          <p:cNvSpPr/>
+          <p:nvPr>
+            <p:ph idx="101" type="body" hasCustomPrompt="1"/>
+          </p:nvPr>
+        </p:nvSpPr>
+        <p:spPr>
+          <a:xfrm>
+            <a:off x="548640" y="1097280"/>
+            <a:ext cx="11091672" cy="384048"/>
+          </a:xfrm>
+          <a:prstGeom prst="rect">
+            <a:avLst/>
+          </a:prstGeom>
+          <a:noFill/>
+          <a:ln/>
+        </p:spPr>
+        <p:txBody>
+          <a:bodyPr wrap="square" lIns="0" tIns="0" rIns="0" bIns="0" rtlCol="0" anchor="ctr"/>
+          <a:lstStyle/>
+          <a:p>
+            <a:pPr algn="l" indent="0" marL="0">
+              <a:buNone/>
+            </a:pPr>
+            <a:r>
+              <a:rPr lang="en-US" sz="1600" dirty="0">
+                <a:solidFill>
+                  <a:schemeClr val="accent5"/>
+                </a:solidFill>
+              </a:rPr>
+              <a:t>Задание: «Собери ровно два образца и сразу возвращайся на базу»</a:t>
+            </a:r>
+            <a:endParaRPr lang="en-US" sz="1600" dirty="0"/>
+          </a:p>
+        </p:txBody>
+      </p:sp>
+      <p:pic>
+        <p:nvPicPr>
+          <p:cNvPr id="5" name="Image 0" descr="Задание: «Собери ровно два образца и сразу возвращайся на базу»">    </p:cNvPr>
+          <p:cNvPicPr>
+            <a:picLocks noChangeAspect="1"/>
+          </p:cNvPicPr>
+          <p:nvPr/>
+        </p:nvPicPr>
+        <p:blipFill>
+          <a:blip r:embed="rId1"/>
+          <a:stretch>
+            <a:fillRect/>
+          </a:stretch>
+        </p:blipFill>
+        <p:spPr>
+          <a:xfrm>
+            <a:off x="548640" y="1691640"/>
+            <a:ext cx="7671661" cy="4526280"/>
+          </a:xfrm>
+          <a:prstGeom prst="rect">
+            <a:avLst/>
+          </a:prstGeom>
+        </p:spPr>
+      </p:pic>
+      <p:sp>
+        <p:nvSpPr>
+          <p:cNvPr id="6" name="Text 2"/>
+          <p:cNvSpPr txBox="1"/>
+          <p:nvPr/>
+        </p:nvSpPr>
+        <p:spPr>
+          <a:xfrm>
+            <a:off x="8549640" y="1691640"/>
+            <a:ext cx="3090672" cy="566928"/>
+          </a:xfrm>
+          <a:prstGeom prst="rect">
+            <a:avLst/>
+          </a:prstGeom>
+          <a:noFill/>
+          <a:ln/>
+        </p:spPr>
+        <p:txBody>
+          <a:bodyPr wrap="square" lIns="0" tIns="0" rIns="0" bIns="0" rtlCol="0" anchor="ctr"/>
+          <a:lstStyle/>
+          <a:p>
+            <a:pPr algn="l" indent="0" marL="0">
+              <a:buNone/>
+            </a:pPr>
+            <a:r>
+              <a:rPr lang="en-US" sz="3400" b="1" dirty="0">
+                <a:solidFill>
+                  <a:schemeClr val="accent1"/>
+                </a:solidFill>
+              </a:rPr>
+              <a:t>6 из 6</a:t>
+            </a:r>
+            <a:endParaRPr lang="en-US" sz="3400" dirty="0"/>
+          </a:p>
+        </p:txBody>
+      </p:sp>
+      <p:sp>
+        <p:nvSpPr>
+          <p:cNvPr id="7" name="Text 3"/>
+          <p:cNvSpPr txBox="1"/>
+          <p:nvPr/>
+        </p:nvSpPr>
+        <p:spPr>
+          <a:xfrm>
+            <a:off x="8549640" y="2295144"/>
+            <a:ext cx="3090672" cy="457200"/>
+          </a:xfrm>
+          <a:prstGeom prst="rect">
+            <a:avLst/>
+          </a:prstGeom>
+          <a:noFill/>
+          <a:ln/>
+        </p:spPr>
+        <p:txBody>
+          <a:bodyPr wrap="square" lIns="0" tIns="0" rIns="0" bIns="0" rtlCol="0" anchor="t"/>
+          <a:lstStyle/>
+          <a:p>
+            <a:pPr algn="l" indent="0" marL="0">
+              <a:buNone/>
+            </a:pPr>
+            <a:r>
+              <a:rPr lang="en-US" sz="1200" dirty="0">
+                <a:solidFill>
+                  <a:schemeClr val="accent5"/>
+                </a:solidFill>
+              </a:rPr>
+              <a:t>прогонов с моделью выполнили задание; правило — 0 из 6</a:t>
+            </a:r>
+            <a:endParaRPr lang="en-US" sz="1200" dirty="0"/>
+          </a:p>
+        </p:txBody>
+      </p:sp>
+      <p:sp>
+        <p:nvSpPr>
+          <p:cNvPr id="8" name="Text 4"/>
+          <p:cNvSpPr txBox="1"/>
+          <p:nvPr/>
+        </p:nvSpPr>
+        <p:spPr>
+          <a:xfrm>
+            <a:off x="8549640" y="2880360"/>
+            <a:ext cx="3090672" cy="1463040"/>
+          </a:xfrm>
+          <a:prstGeom prst="rect">
+            <a:avLst/>
+          </a:prstGeom>
+          <a:noFill/>
+          <a:ln/>
+        </p:spPr>
+        <p:txBody>
+          <a:bodyPr wrap="square" lIns="0" tIns="0" rIns="0" bIns="0" rtlCol="0" anchor="t"/>
+          <a:lstStyle/>
+          <a:p>
+            <a:pPr algn="l" indent="0" marL="0">
+              <a:buNone/>
+            </a:pPr>
+            <a:r>
+              <a:rPr lang="en-US" sz="1500" dirty="0">
+                <a:solidFill>
+                  <a:schemeClr val="tx1"/>
+                </a:solidFill>
+              </a:rPr>
+              <a:t>Меняем текст задания — меняется поведение. На обычной миссии модель счёт не повышает.</a:t>
+            </a:r>
+            <a:endParaRPr lang="en-US" sz="1500" dirty="0"/>
+          </a:p>
+        </p:txBody>
+      </p:sp>
+      <p:sp>
+        <p:nvSpPr>
+          <p:cNvPr id="9" name="Shape 5"/>
+          <p:cNvSpPr/>
+          <p:nvPr/>
+        </p:nvSpPr>
+        <p:spPr>
+          <a:xfrm>
+            <a:off x="8549640" y="4480560"/>
+            <a:ext cx="3090672" cy="0"/>
+          </a:xfrm>
+          <a:prstGeom prst="line">
+            <a:avLst/>
+          </a:prstGeom>
+          <a:noFill/>
+          <a:ln w="9525">
+            <a:solidFill>
+              <a:srgbClr val="D5D9DE"/>
+            </a:solidFill>
+            <a:prstDash val="solid"/>
+          </a:ln>
+        </p:spPr>
+      </p:sp>
+      <p:sp>
+        <p:nvSpPr>
+          <p:cNvPr id="10" name="Text 6"/>
+          <p:cNvSpPr txBox="1"/>
+          <p:nvPr/>
+        </p:nvSpPr>
+        <p:spPr>
+          <a:xfrm>
+            <a:off x="8549640" y="4572000"/>
+            <a:ext cx="3090672" cy="256032"/>
+          </a:xfrm>
+          <a:prstGeom prst="rect">
+            <a:avLst/>
+          </a:prstGeom>
+          <a:noFill/>
+          <a:ln/>
+        </p:spPr>
+        <p:txBody>
+          <a:bodyPr wrap="square" lIns="0" tIns="0" rIns="0" bIns="0" rtlCol="0" anchor="t"/>
+          <a:lstStyle/>
+          <a:p>
+            <a:pPr algn="l" indent="0" marL="0">
+              <a:buNone/>
+            </a:pPr>
+            <a:r>
+              <a:rPr lang="en-US" sz="1100" b="1" dirty="0">
+                <a:solidFill>
+                  <a:schemeClr val="accent5"/>
+                </a:solidFill>
+              </a:rPr>
+              <a:t>В ролике</a:t>
+            </a:r>
+            <a:endParaRPr lang="en-US" sz="1100" dirty="0"/>
+          </a:p>
+        </p:txBody>
+      </p:sp>
+      <p:sp>
+        <p:nvSpPr>
+          <p:cNvPr id="11" name="Text 7"/>
+          <p:cNvSpPr txBox="1"/>
+          <p:nvPr/>
+        </p:nvSpPr>
+        <p:spPr>
+          <a:xfrm>
+            <a:off x="8549640" y="4846320"/>
+            <a:ext cx="3090672" cy="1371600"/>
+          </a:xfrm>
+          <a:prstGeom prst="rect">
+            <a:avLst/>
+          </a:prstGeom>
+          <a:noFill/>
+          <a:ln/>
+        </p:spPr>
+        <p:txBody>
+          <a:bodyPr wrap="square" lIns="0" tIns="0" rIns="0" bIns="0" rtlCol="0" anchor="t"/>
+          <a:lstStyle/>
+          <a:p>
+            <a:pPr algn="l" indent="0" marL="0">
+              <a:buNone/>
+            </a:pPr>
+            <a:r>
+              <a:rPr lang="en-US" sz="1250" dirty="0">
+                <a:solidFill>
+                  <a:schemeClr val="tx1"/>
+                </a:solidFill>
+              </a:rPr>
+              <a:t>Правило текста не читает и собирает дальше: 5 образцов. Модель после второго поворачивает на базу.</a:t>
+            </a:r>
+            <a:endParaRPr lang="en-US" sz="1250" dirty="0"/>
+          </a:p>
+        </p:txBody>
+      </p:sp>
+    </p:spTree>
+  </p:cSld>
+  <p:clrMapOvr>
+    <a:masterClrMapping/>
+  </p:clrMapOvr>
+</p:sld>
+</file>
+
+<file path=ppt/slides/slide6.xml><?xml version="1.0" encoding="utf-8"?>
+<p:sld xmlns:a="http://schemas.openxmlformats.org/drawingml/2006/main" xmlns:r="http://schemas.openxmlformats.org/officeDocument/2006/relationships" xmlns:p="http://schemas.openxmlformats.org/presentationml/2006/main">
+  <p:cSld name="Slide 6">
+    <p:spTree>
+      <p:nvGrpSpPr>
+        <p:cNvPr id="1" name=""/>
+        <p:cNvGrpSpPr/>
+        <p:nvPr/>
+      </p:nvGrpSpPr>
+      <p:grpSpPr>
+        <a:xfrm>
+          <a:off x="0" y="0"/>
+          <a:ext cx="0" cy="0"/>
+          <a:chOff x="0" y="0"/>
+          <a:chExt cx="0" cy="0"/>
+        </a:xfrm>
+      </p:grpSpPr>
+      <p:sp>
+        <p:nvSpPr>
+          <p:cNvPr id="2" name="Text 0"/>
+          <p:cNvSpPr/>
+          <p:nvPr>
+            <p:ph idx="100" type="title" hasCustomPrompt="1"/>
+          </p:nvPr>
+        </p:nvSpPr>
+        <p:spPr>
+          <a:xfrm>
+            <a:off x="548640" y="384048"/>
+            <a:ext cx="11091672" cy="685800"/>
+          </a:xfrm>
+          <a:prstGeom prst="rect">
+            <a:avLst/>
+          </a:prstGeom>
+          <a:noFill/>
+          <a:ln/>
+        </p:spPr>
+        <p:txBody>
+          <a:bodyPr wrap="square" lIns="0" tIns="0" rIns="0" bIns="0" rtlCol="0" anchor="ctr"/>
+          <a:lstStyle/>
+          <a:p>
+            <a:pPr algn="l" indent="0" marL="0">
+              <a:buNone/>
+            </a:pPr>
+            <a:r>
+              <a:rPr lang="en-US" sz="3200" b="1" dirty="0">
+                <a:solidFill>
+                  <a:schemeClr val="tx1"/>
+                </a:solidFill>
+              </a:rPr>
+              <a:t>Опыт 4. Миссия словами: запретная половина</a:t>
+            </a:r>
+            <a:endParaRPr lang="en-US" sz="3200" dirty="0"/>
+          </a:p>
+        </p:txBody>
+      </p:sp>
+      <p:sp>
+        <p:nvSpPr>
+          <p:cNvPr id="3" name="Text 0"/>
+          <p:cNvSpPr/>
+          <p:nvPr>
+            <p:ph idx="101" type="body" hasCustomPrompt="1"/>
+          </p:nvPr>
+        </p:nvSpPr>
+        <p:spPr>
+          <a:xfrm>
+            <a:off x="548640" y="1097280"/>
+            <a:ext cx="11091672" cy="384048"/>
+          </a:xfrm>
+          <a:prstGeom prst="rect">
+            <a:avLst/>
+          </a:prstGeom>
+          <a:noFill/>
+          <a:ln/>
+        </p:spPr>
+        <p:txBody>
+          <a:bodyPr wrap="square" lIns="0" tIns="0" rIns="0" bIns="0" rtlCol="0" anchor="ctr"/>
+          <a:lstStyle/>
+          <a:p>
+            <a:pPr algn="l" indent="0" marL="0">
+              <a:buNone/>
+            </a:pPr>
+            <a:r>
+              <a:rPr lang="en-US" sz="1600" dirty="0">
+                <a:solidFill>
+                  <a:schemeClr val="accent5"/>
+                </a:solidFill>
+              </a:rPr>
+              <a:t>Задание: «Не заезжай в правую половину арены (x больше 0,5 м)»</a:t>
+            </a:r>
+            <a:endParaRPr lang="en-US" sz="1600" dirty="0"/>
+          </a:p>
+        </p:txBody>
+      </p:sp>
+      <p:pic>
+        <p:nvPicPr>
+          <p:cNvPr id="5" name="Image 0" descr="Задание: «Не заезжай в правую половину арены (x больше 0,5 м)»">    </p:cNvPr>
+          <p:cNvPicPr>
+            <a:picLocks noChangeAspect="1"/>
+          </p:cNvPicPr>
+          <p:nvPr/>
+        </p:nvPicPr>
+        <p:blipFill>
+          <a:blip r:embed="rId1"/>
+          <a:stretch>
+            <a:fillRect/>
+          </a:stretch>
+        </p:blipFill>
+        <p:spPr>
+          <a:xfrm>
+            <a:off x="548640" y="1691640"/>
+            <a:ext cx="7671661" cy="4526280"/>
+          </a:xfrm>
+          <a:prstGeom prst="rect">
+            <a:avLst/>
+          </a:prstGeom>
+        </p:spPr>
+      </p:pic>
+      <p:sp>
+        <p:nvSpPr>
+          <p:cNvPr id="6" name="Text 2"/>
+          <p:cNvSpPr txBox="1"/>
+          <p:nvPr/>
+        </p:nvSpPr>
+        <p:spPr>
+          <a:xfrm>
+            <a:off x="8549640" y="1691640"/>
+            <a:ext cx="3090672" cy="566928"/>
+          </a:xfrm>
+          <a:prstGeom prst="rect">
+            <a:avLst/>
+          </a:prstGeom>
+          <a:noFill/>
+          <a:ln/>
+        </p:spPr>
+        <p:txBody>
+          <a:bodyPr wrap="square" lIns="0" tIns="0" rIns="0" bIns="0" rtlCol="0" anchor="ctr"/>
+          <a:lstStyle/>
+          <a:p>
+            <a:pPr algn="l" indent="0" marL="0">
+              <a:buNone/>
+            </a:pPr>
+            <a:r>
+              <a:rPr lang="en-US" sz="3400" b="1" dirty="0">
+                <a:solidFill>
+                  <a:schemeClr val="accent1"/>
+                </a:solidFill>
+              </a:rPr>
+              <a:t>5 из 6</a:t>
+            </a:r>
+            <a:endParaRPr lang="en-US" sz="3400" dirty="0"/>
+          </a:p>
+        </p:txBody>
+      </p:sp>
+      <p:sp>
+        <p:nvSpPr>
+          <p:cNvPr id="7" name="Text 3"/>
+          <p:cNvSpPr txBox="1"/>
+          <p:nvPr/>
+        </p:nvSpPr>
+        <p:spPr>
+          <a:xfrm>
+            <a:off x="8549640" y="2295144"/>
+            <a:ext cx="3090672" cy="457200"/>
+          </a:xfrm>
+          <a:prstGeom prst="rect">
+            <a:avLst/>
+          </a:prstGeom>
+          <a:noFill/>
+          <a:ln/>
+        </p:spPr>
+        <p:txBody>
+          <a:bodyPr wrap="square" lIns="0" tIns="0" rIns="0" bIns="0" rtlCol="0" anchor="t"/>
+          <a:lstStyle/>
+          <a:p>
+            <a:pPr algn="l" indent="0" marL="0">
+              <a:buNone/>
+            </a:pPr>
+            <a:r>
+              <a:rPr lang="en-US" sz="1200" dirty="0">
+                <a:solidFill>
+                  <a:schemeClr val="accent5"/>
+                </a:solidFill>
+              </a:rPr>
+              <a:t>прогонов без заезда за черту; правило — 0 из 6</a:t>
+            </a:r>
+            <a:endParaRPr lang="en-US" sz="1200" dirty="0"/>
+          </a:p>
+        </p:txBody>
+      </p:sp>
+      <p:sp>
+        <p:nvSpPr>
+          <p:cNvPr id="8" name="Text 4"/>
+          <p:cNvSpPr txBox="1"/>
+          <p:nvPr/>
+        </p:nvSpPr>
+        <p:spPr>
+          <a:xfrm>
+            <a:off x="8549640" y="2880360"/>
+            <a:ext cx="3090672" cy="1463040"/>
+          </a:xfrm>
+          <a:prstGeom prst="rect">
+            <a:avLst/>
+          </a:prstGeom>
+          <a:noFill/>
+          <a:ln/>
+        </p:spPr>
+        <p:txBody>
+          <a:bodyPr wrap="square" lIns="0" tIns="0" rIns="0" bIns="0" rtlCol="0" anchor="t"/>
+          <a:lstStyle/>
+          <a:p>
+            <a:pPr algn="l" indent="0" marL="0">
+              <a:buNone/>
+            </a:pPr>
+            <a:r>
+              <a:rPr lang="en-US" sz="1500" dirty="0">
+                <a:solidFill>
+                  <a:schemeClr val="tx1"/>
+                </a:solidFill>
+              </a:rPr>
+              <a:t>Запрет есть только в тексте задания. Здесь модель отвечает на каждое решение; если часть решений оставить правилу — 1 из 6.</a:t>
+            </a:r>
+            <a:endParaRPr lang="en-US" sz="1500" dirty="0"/>
+          </a:p>
+        </p:txBody>
+      </p:sp>
+      <p:sp>
+        <p:nvSpPr>
+          <p:cNvPr id="9" name="Shape 5"/>
+          <p:cNvSpPr/>
+          <p:nvPr/>
+        </p:nvSpPr>
+        <p:spPr>
+          <a:xfrm>
+            <a:off x="8549640" y="4480560"/>
+            <a:ext cx="3090672" cy="0"/>
+          </a:xfrm>
+          <a:prstGeom prst="line">
+            <a:avLst/>
+          </a:prstGeom>
+          <a:noFill/>
+          <a:ln w="9525">
+            <a:solidFill>
+              <a:srgbClr val="D5D9DE"/>
+            </a:solidFill>
+            <a:prstDash val="solid"/>
+          </a:ln>
+        </p:spPr>
+      </p:sp>
+      <p:sp>
+        <p:nvSpPr>
+          <p:cNvPr id="10" name="Text 6"/>
+          <p:cNvSpPr txBox="1"/>
+          <p:nvPr/>
+        </p:nvSpPr>
+        <p:spPr>
+          <a:xfrm>
+            <a:off x="8549640" y="4572000"/>
+            <a:ext cx="3090672" cy="256032"/>
+          </a:xfrm>
+          <a:prstGeom prst="rect">
+            <a:avLst/>
+          </a:prstGeom>
+          <a:noFill/>
+          <a:ln/>
+        </p:spPr>
+        <p:txBody>
+          <a:bodyPr wrap="square" lIns="0" tIns="0" rIns="0" bIns="0" rtlCol="0" anchor="t"/>
+          <a:lstStyle/>
+          <a:p>
+            <a:pPr algn="l" indent="0" marL="0">
+              <a:buNone/>
+            </a:pPr>
+            <a:r>
+              <a:rPr lang="en-US" sz="1100" b="1" dirty="0">
+                <a:solidFill>
+                  <a:schemeClr val="accent5"/>
+                </a:solidFill>
+              </a:rPr>
+              <a:t>В ролике</a:t>
+            </a:r>
+            <a:endParaRPr lang="en-US" sz="1100" dirty="0"/>
+          </a:p>
+        </p:txBody>
+      </p:sp>
+      <p:sp>
+        <p:nvSpPr>
+          <p:cNvPr id="11" name="Text 7"/>
+          <p:cNvSpPr txBox="1"/>
+          <p:nvPr/>
+        </p:nvSpPr>
+        <p:spPr>
+          <a:xfrm>
+            <a:off x="8549640" y="4846320"/>
+            <a:ext cx="3090672" cy="1371600"/>
+          </a:xfrm>
+          <a:prstGeom prst="rect">
+            <a:avLst/>
+          </a:prstGeom>
+          <a:noFill/>
+          <a:ln/>
+        </p:spPr>
+        <p:txBody>
+          <a:bodyPr wrap="square" lIns="0" tIns="0" rIns="0" bIns="0" rtlCol="0" anchor="t"/>
+          <a:lstStyle/>
+          <a:p>
+            <a:pPr algn="l" indent="0" marL="0">
+              <a:buNone/>
+            </a:pPr>
+            <a:r>
+              <a:rPr lang="en-US" sz="1250" dirty="0">
+                <a:solidFill>
+                  <a:schemeClr val="tx1"/>
+                </a:solidFill>
+              </a:rPr>
+              <a:t>Красная черта — граница из задания. Робот на правиле её пересекает, робот с моделью — нет.</a:t>
+            </a:r>
+            <a:endParaRPr lang="en-US" sz="1250" dirty="0"/>
+          </a:p>
+        </p:txBody>
+      </p:sp>
+    </p:spTree>
+  </p:cSld>
+  <p:clrMapOvr>
+    <a:masterClrMapping/>
+  </p:clrMapOvr>
+</p:sld>
+</file>
+
+<file path=ppt/slides/slide7.xml><?xml version="1.0" encoding="utf-8"?>
+<p:sld xmlns:a="http://schemas.openxmlformats.org/drawingml/2006/main" xmlns:r="http://schemas.openxmlformats.org/officeDocument/2006/relationships" xmlns:p="http://schemas.openxmlformats.org/presentationml/2006/main">
+  <p:cSld name="Slide 7">
+    <p:spTree>
+      <p:nvGrpSpPr>
+        <p:cNvPr id="1" name=""/>
+        <p:cNvGrpSpPr/>
+        <p:nvPr/>
+      </p:nvGrpSpPr>
+      <p:grpSpPr>
+        <a:xfrm>
+          <a:off x="0" y="0"/>
+          <a:ext cx="0" cy="0"/>
+          <a:chOff x="0" y="0"/>
+          <a:chExt cx="0" cy="0"/>
+        </a:xfrm>
+      </p:grpSpPr>
+      <p:sp>
+        <p:nvSpPr>
+          <p:cNvPr id="2" name="Text 0"/>
+          <p:cNvSpPr/>
+          <p:nvPr>
+            <p:ph idx="100" type="title" hasCustomPrompt="1"/>
+          </p:nvPr>
+        </p:nvSpPr>
+        <p:spPr>
+          <a:xfrm>
+            <a:off x="548640" y="384048"/>
+            <a:ext cx="11091672" cy="685800"/>
+          </a:xfrm>
+          <a:prstGeom prst="rect">
+            <a:avLst/>
+          </a:prstGeom>
+          <a:noFill/>
+          <a:ln/>
+        </p:spPr>
+        <p:txBody>
+          <a:bodyPr wrap="square" lIns="0" tIns="0" rIns="0" bIns="0" rtlCol="0" anchor="ctr"/>
+          <a:lstStyle/>
+          <a:p>
+            <a:pPr algn="l" indent="0" marL="0">
+              <a:buNone/>
+            </a:pPr>
+            <a:r>
+              <a:rPr lang="en-US" sz="3200" b="1" dirty="0">
+                <a:solidFill>
+                  <a:schemeClr val="tx1"/>
+                </a:solidFill>
+              </a:rPr>
+              <a:t>Опыт 5. Журнал гипотез и скрытая правда</a:t>
+            </a:r>
+            <a:endParaRPr lang="en-US" sz="3200" dirty="0"/>
+          </a:p>
+        </p:txBody>
+      </p:sp>
+      <p:sp>
+        <p:nvSpPr>
+          <p:cNvPr id="3" name="Text 0"/>
+          <p:cNvSpPr/>
+          <p:nvPr>
+            <p:ph idx="101" type="body" hasCustomPrompt="1"/>
+          </p:nvPr>
+        </p:nvSpPr>
+        <p:spPr>
+          <a:xfrm>
+            <a:off x="548640" y="1097280"/>
+            <a:ext cx="11091672" cy="384048"/>
+          </a:xfrm>
+          <a:prstGeom prst="rect">
+            <a:avLst/>
+          </a:prstGeom>
+          <a:noFill/>
+          <a:ln/>
+        </p:spPr>
+        <p:txBody>
+          <a:bodyPr wrap="square" lIns="0" tIns="0" rIns="0" bIns="0" rtlCol="0" anchor="ctr"/>
+          <a:lstStyle/>
+          <a:p>
+            <a:pPr algn="l" indent="0" marL="0">
+              <a:buNone/>
+            </a:pPr>
+            <a:r>
+              <a:rPr lang="en-US" sz="1600" dirty="0">
+                <a:solidFill>
+                  <a:schemeClr val="accent5"/>
+                </a:solidFill>
+              </a:rPr>
+              <a:t>Справа — журнал робота; после финиша его выводы сверяются со скрытой правдой среды</a:t>
+            </a:r>
+            <a:endParaRPr lang="en-US" sz="1600" dirty="0"/>
+          </a:p>
+        </p:txBody>
+      </p:sp>
+      <p:pic>
+        <p:nvPicPr>
+          <p:cNvPr id="5" name="Image 0" descr="Справа — журнал робота; после финиша его выводы сверяются со скрытой правдой среды">    </p:cNvPr>
+          <p:cNvPicPr>
+            <a:picLocks noChangeAspect="1"/>
+          </p:cNvPicPr>
+          <p:nvPr/>
+        </p:nvPicPr>
+        <p:blipFill>
+          <a:blip r:embed="rId1"/>
+          <a:stretch>
+            <a:fillRect/>
+          </a:stretch>
+        </p:blipFill>
+        <p:spPr>
+          <a:xfrm>
+            <a:off x="548640" y="1691640"/>
+            <a:ext cx="7671661" cy="4526280"/>
+          </a:xfrm>
+          <a:prstGeom prst="rect">
+            <a:avLst/>
+          </a:prstGeom>
+        </p:spPr>
+      </p:pic>
+      <p:sp>
+        <p:nvSpPr>
+          <p:cNvPr id="6" name="Text 2"/>
+          <p:cNvSpPr txBox="1"/>
+          <p:nvPr/>
+        </p:nvSpPr>
+        <p:spPr>
+          <a:xfrm>
+            <a:off x="8549640" y="1691640"/>
+            <a:ext cx="3090672" cy="566928"/>
+          </a:xfrm>
+          <a:prstGeom prst="rect">
+            <a:avLst/>
+          </a:prstGeom>
+          <a:noFill/>
+          <a:ln/>
+        </p:spPr>
+        <p:txBody>
+          <a:bodyPr wrap="square" lIns="0" tIns="0" rIns="0" bIns="0" rtlCol="0" anchor="ctr"/>
+          <a:lstStyle/>
+          <a:p>
+            <a:pPr algn="l" indent="0" marL="0">
+              <a:buNone/>
+            </a:pPr>
+            <a:r>
+              <a:rPr lang="en-US" sz="3400" b="1" dirty="0">
+                <a:solidFill>
+                  <a:schemeClr val="accent1"/>
+                </a:solidFill>
+              </a:rPr>
+              <a:t>98%</a:t>
+            </a:r>
+            <a:endParaRPr lang="en-US" sz="3400" dirty="0"/>
+          </a:p>
+        </p:txBody>
+      </p:sp>
+      <p:sp>
+        <p:nvSpPr>
+          <p:cNvPr id="7" name="Text 3"/>
+          <p:cNvSpPr txBox="1"/>
+          <p:nvPr/>
+        </p:nvSpPr>
+        <p:spPr>
+          <a:xfrm>
+            <a:off x="8549640" y="2295144"/>
+            <a:ext cx="3090672" cy="457200"/>
+          </a:xfrm>
+          <a:prstGeom prst="rect">
+            <a:avLst/>
+          </a:prstGeom>
+          <a:noFill/>
+          <a:ln/>
+        </p:spPr>
+        <p:txBody>
+          <a:bodyPr wrap="square" lIns="0" tIns="0" rIns="0" bIns="0" rtlCol="0" anchor="t"/>
+          <a:lstStyle/>
+          <a:p>
+            <a:pPr algn="l" indent="0" marL="0">
+              <a:buNone/>
+            </a:pPr>
+            <a:r>
+              <a:rPr lang="en-US" sz="1200" dirty="0">
+                <a:solidFill>
+                  <a:schemeClr val="accent5"/>
+                </a:solidFill>
+              </a:rPr>
+              <a:t>гипотез о грунте верны; у адаптивного агента — 61%</a:t>
+            </a:r>
+            <a:endParaRPr lang="en-US" sz="1200" dirty="0"/>
+          </a:p>
+        </p:txBody>
+      </p:sp>
+      <p:sp>
+        <p:nvSpPr>
+          <p:cNvPr id="8" name="Text 4"/>
+          <p:cNvSpPr txBox="1"/>
+          <p:nvPr/>
+        </p:nvSpPr>
+        <p:spPr>
+          <a:xfrm>
+            <a:off x="8549640" y="2880360"/>
+            <a:ext cx="3090672" cy="1463040"/>
+          </a:xfrm>
+          <a:prstGeom prst="rect">
+            <a:avLst/>
+          </a:prstGeom>
+          <a:noFill/>
+          <a:ln/>
+        </p:spPr>
+        <p:txBody>
+          <a:bodyPr wrap="square" lIns="0" tIns="0" rIns="0" bIns="0" rtlCol="0" anchor="t"/>
+          <a:lstStyle/>
+          <a:p>
+            <a:pPr algn="l" indent="0" marL="0">
+              <a:buNone/>
+            </a:pPr>
+            <a:r>
+              <a:rPr lang="en-US" sz="1500" dirty="0">
+                <a:solidFill>
+                  <a:schemeClr val="tx1"/>
+                </a:solidFill>
+              </a:rPr>
+              <a:t>Исследователь проверяет другие объяснения и ошибается реже. Счёт почти тот же: 68,4 и 67,5.</a:t>
+            </a:r>
+            <a:endParaRPr lang="en-US" sz="1500" dirty="0"/>
+          </a:p>
+        </p:txBody>
+      </p:sp>
+      <p:sp>
+        <p:nvSpPr>
+          <p:cNvPr id="9" name="Shape 5"/>
+          <p:cNvSpPr/>
+          <p:nvPr/>
+        </p:nvSpPr>
+        <p:spPr>
+          <a:xfrm>
+            <a:off x="8549640" y="4480560"/>
+            <a:ext cx="3090672" cy="0"/>
+          </a:xfrm>
+          <a:prstGeom prst="line">
+            <a:avLst/>
+          </a:prstGeom>
+          <a:noFill/>
+          <a:ln w="9525">
+            <a:solidFill>
+              <a:srgbClr val="D5D9DE"/>
+            </a:solidFill>
+            <a:prstDash val="solid"/>
+          </a:ln>
+        </p:spPr>
+      </p:sp>
+      <p:sp>
+        <p:nvSpPr>
+          <p:cNvPr id="10" name="Text 6"/>
+          <p:cNvSpPr txBox="1"/>
+          <p:nvPr/>
+        </p:nvSpPr>
+        <p:spPr>
+          <a:xfrm>
+            <a:off x="8549640" y="4572000"/>
+            <a:ext cx="3090672" cy="256032"/>
+          </a:xfrm>
+          <a:prstGeom prst="rect">
+            <a:avLst/>
+          </a:prstGeom>
+          <a:noFill/>
+          <a:ln/>
+        </p:spPr>
+        <p:txBody>
+          <a:bodyPr wrap="square" lIns="0" tIns="0" rIns="0" bIns="0" rtlCol="0" anchor="t"/>
+          <a:lstStyle/>
+          <a:p>
+            <a:pPr algn="l" indent="0" marL="0">
+              <a:buNone/>
+            </a:pPr>
+            <a:r>
+              <a:rPr lang="en-US" sz="1100" b="1" dirty="0">
+                <a:solidFill>
+                  <a:schemeClr val="accent5"/>
+                </a:solidFill>
+              </a:rPr>
+              <a:t>В ролике</a:t>
+            </a:r>
+            <a:endParaRPr lang="en-US" sz="1100" dirty="0"/>
+          </a:p>
+        </p:txBody>
+      </p:sp>
+      <p:sp>
+        <p:nvSpPr>
+          <p:cNvPr id="11" name="Text 7"/>
+          <p:cNvSpPr txBox="1"/>
+          <p:nvPr/>
+        </p:nvSpPr>
+        <p:spPr>
+          <a:xfrm>
+            <a:off x="8549640" y="4846320"/>
+            <a:ext cx="3090672" cy="1371600"/>
+          </a:xfrm>
+          <a:prstGeom prst="rect">
+            <a:avLst/>
+          </a:prstGeom>
+          <a:noFill/>
+          <a:ln/>
+        </p:spPr>
+        <p:txBody>
+          <a:bodyPr wrap="square" lIns="0" tIns="0" rIns="0" bIns="0" rtlCol="0" anchor="t"/>
+          <a:lstStyle/>
+          <a:p>
+            <a:pPr algn="l" indent="0" marL="0">
+              <a:buNone/>
+            </a:pPr>
+            <a:r>
+              <a:rPr lang="en-US" sz="1250" dirty="0">
+                <a:solidFill>
+                  <a:schemeClr val="tx1"/>
+                </a:solidFill>
+              </a:rPr>
+              <a:t>Строка появляется, когда робот выдвигает гипотезу. Ошибка в строке H6: грунт сменился как раз во время измерения.</a:t>
+            </a:r>
+            <a:endParaRPr lang="en-US" sz="1250" dirty="0"/>
+          </a:p>
+        </p:txBody>
+      </p:sp>
+    </p:spTree>
+  </p:cSld>
+  <p:clrMapOvr>
+    <a:masterClrMapping/>
+  </p:clrMapOvr>
+</p:sld>
+</file>
+
+<file path=ppt/slides/slide8.xml><?xml version="1.0" encoding="utf-8"?>
+<p:sld xmlns:a="http://schemas.openxmlformats.org/drawingml/2006/main" xmlns:r="http://schemas.openxmlformats.org/officeDocument/2006/relationships" xmlns:p="http://schemas.openxmlformats.org/presentationml/2006/main">
+  <p:cSld name="Slide 8">
+    <p:spTree>
+      <p:nvGrpSpPr>
+        <p:cNvPr id="1" name=""/>
+        <p:cNvGrpSpPr/>
+        <p:nvPr/>
+      </p:nvGrpSpPr>
+      <p:grpSpPr>
+        <a:xfrm>
+          <a:off x="0" y="0"/>
+          <a:ext cx="0" cy="0"/>
+          <a:chOff x="0" y="0"/>
+          <a:chExt cx="0" cy="0"/>
+        </a:xfrm>
+      </p:grpSpPr>
+      <p:sp>
+        <p:nvSpPr>
+          <p:cNvPr id="2" name="Text 0"/>
+          <p:cNvSpPr/>
+          <p:nvPr>
+            <p:ph idx="100" type="title" hasCustomPrompt="1"/>
+          </p:nvPr>
+        </p:nvSpPr>
+        <p:spPr>
+          <a:xfrm>
+            <a:off x="548640" y="384048"/>
+            <a:ext cx="11091672" cy="685800"/>
+          </a:xfrm>
+          <a:prstGeom prst="rect">
+            <a:avLst/>
+          </a:prstGeom>
+          <a:noFill/>
+          <a:ln/>
+        </p:spPr>
+        <p:txBody>
+          <a:bodyPr wrap="square" lIns="0" tIns="0" rIns="0" bIns="0" rtlCol="0" anchor="ctr"/>
+          <a:lstStyle/>
+          <a:p>
+            <a:pPr algn="l" indent="0" marL="0">
+              <a:buNone/>
+            </a:pPr>
+            <a:r>
+              <a:rPr lang="en-US" sz="3200" b="1" dirty="0">
+                <a:solidFill>
+                  <a:schemeClr val="tx1"/>
+                </a:solidFill>
+              </a:rPr>
+              <a:t>Опыт 6. Перенос в Gazebo</a:t>
+            </a:r>
+            <a:endParaRPr lang="en-US" sz="3200" dirty="0"/>
+          </a:p>
+        </p:txBody>
+      </p:sp>
+      <p:sp>
+        <p:nvSpPr>
+          <p:cNvPr id="3" name="Text 0"/>
+          <p:cNvSpPr/>
+          <p:nvPr>
+            <p:ph idx="101" type="body" hasCustomPrompt="1"/>
+          </p:nvPr>
+        </p:nvSpPr>
+        <p:spPr>
+          <a:xfrm>
+            <a:off x="548640" y="1097280"/>
+            <a:ext cx="11091672" cy="384048"/>
+          </a:xfrm>
+          <a:prstGeom prst="rect">
+            <a:avLst/>
+          </a:prstGeom>
+          <a:noFill/>
+          <a:ln/>
+        </p:spPr>
+        <p:txBody>
+          <a:bodyPr wrap="square" lIns="0" tIns="0" rIns="0" bIns="0" rtlCol="0" anchor="ctr"/>
+          <a:lstStyle/>
+          <a:p>
+            <a:pPr algn="l" indent="0" marL="0">
+              <a:buNone/>
+            </a:pPr>
+            <a:r>
+              <a:rPr lang="en-US" sz="1600" dirty="0">
+                <a:solidFill>
+                  <a:schemeClr val="accent5"/>
+                </a:solidFill>
+              </a:rPr>
+              <a:t>Один сценарий трудного уровня, один агент, два симулятора</a:t>
+            </a:r>
+            <a:endParaRPr lang="en-US" sz="1600" dirty="0"/>
+          </a:p>
+        </p:txBody>
+      </p:sp>
+      <p:pic>
+        <p:nvPicPr>
+          <p:cNvPr id="5" name="Image 0" descr="Один сценарий трудного уровня, один агент, два симулятора">    </p:cNvPr>
+          <p:cNvPicPr>
+            <a:picLocks noChangeAspect="1"/>
+          </p:cNvPicPr>
+          <p:nvPr/>
+        </p:nvPicPr>
+        <p:blipFill>
+          <a:blip r:embed="rId1"/>
+          <a:stretch>
+            <a:fillRect/>
+          </a:stretch>
+        </p:blipFill>
+        <p:spPr>
+          <a:xfrm>
+            <a:off x="548640" y="1691640"/>
+            <a:ext cx="7671661" cy="4526280"/>
+          </a:xfrm>
+          <a:prstGeom prst="rect">
+            <a:avLst/>
+          </a:prstGeom>
+        </p:spPr>
+      </p:pic>
+      <p:sp>
+        <p:nvSpPr>
+          <p:cNvPr id="6" name="Text 2"/>
+          <p:cNvSpPr txBox="1"/>
+          <p:nvPr/>
+        </p:nvSpPr>
+        <p:spPr>
+          <a:xfrm>
+            <a:off x="8549640" y="1691640"/>
+            <a:ext cx="3090672" cy="566928"/>
+          </a:xfrm>
+          <a:prstGeom prst="rect">
+            <a:avLst/>
+          </a:prstGeom>
+          <a:noFill/>
+          <a:ln/>
+        </p:spPr>
+        <p:txBody>
+          <a:bodyPr wrap="square" lIns="0" tIns="0" rIns="0" bIns="0" rtlCol="0" anchor="ctr"/>
+          <a:lstStyle/>
+          <a:p>
+            <a:pPr algn="l" indent="0" marL="0">
+              <a:buNone/>
+            </a:pPr>
+            <a:r>
+              <a:rPr lang="en-US" sz="3400" b="1" dirty="0">
+                <a:solidFill>
+                  <a:schemeClr val="accent1"/>
+                </a:solidFill>
+              </a:rPr>
+              <a:t>+0,2 очка</a:t>
+            </a:r>
+            <a:endParaRPr lang="en-US" sz="3400" dirty="0"/>
+          </a:p>
+        </p:txBody>
+      </p:sp>
+      <p:sp>
+        <p:nvSpPr>
+          <p:cNvPr id="7" name="Text 3"/>
+          <p:cNvSpPr txBox="1"/>
+          <p:nvPr/>
+        </p:nvSpPr>
+        <p:spPr>
+          <a:xfrm>
+            <a:off x="8549640" y="2295144"/>
+            <a:ext cx="3090672" cy="457200"/>
+          </a:xfrm>
+          <a:prstGeom prst="rect">
+            <a:avLst/>
+          </a:prstGeom>
+          <a:noFill/>
+          <a:ln/>
+        </p:spPr>
+        <p:txBody>
+          <a:bodyPr wrap="square" lIns="0" tIns="0" rIns="0" bIns="0" rtlCol="0" anchor="t"/>
+          <a:lstStyle/>
+          <a:p>
+            <a:pPr algn="l" indent="0" marL="0">
+              <a:buNone/>
+            </a:pPr>
+            <a:r>
+              <a:rPr lang="en-US" sz="1200" dirty="0">
+                <a:solidFill>
+                  <a:schemeClr val="accent5"/>
+                </a:solidFill>
+              </a:rPr>
+              <a:t>средняя разность счёта · 11 сценариев</a:t>
+            </a:r>
+            <a:endParaRPr lang="en-US" sz="1200" dirty="0"/>
+          </a:p>
+        </p:txBody>
+      </p:sp>
+      <p:sp>
+        <p:nvSpPr>
+          <p:cNvPr id="8" name="Text 4"/>
+          <p:cNvSpPr txBox="1"/>
+          <p:nvPr/>
+        </p:nvSpPr>
+        <p:spPr>
+          <a:xfrm>
+            <a:off x="8549640" y="2880360"/>
+            <a:ext cx="3090672" cy="1463040"/>
+          </a:xfrm>
+          <a:prstGeom prst="rect">
+            <a:avLst/>
+          </a:prstGeom>
+          <a:noFill/>
+          <a:ln/>
+        </p:spPr>
+        <p:txBody>
+          <a:bodyPr wrap="square" lIns="0" tIns="0" rIns="0" bIns="0" rtlCol="0" anchor="t"/>
+          <a:lstStyle/>
+          <a:p>
+            <a:pPr algn="l" indent="0" marL="0">
+              <a:buNone/>
+            </a:pPr>
+            <a:r>
+              <a:rPr lang="en-US" sz="1500" dirty="0">
+                <a:solidFill>
+                  <a:schemeClr val="tx1"/>
+                </a:solidFill>
+              </a:rPr>
+              <a:t>В 7 сценариях из 11 счёт сходится до 6 очков. Систематического сдвига нет.</a:t>
+            </a:r>
+            <a:endParaRPr lang="en-US" sz="1500" dirty="0"/>
+          </a:p>
+        </p:txBody>
+      </p:sp>
+      <p:sp>
+        <p:nvSpPr>
+          <p:cNvPr id="9" name="Shape 5"/>
+          <p:cNvSpPr/>
+          <p:nvPr/>
+        </p:nvSpPr>
+        <p:spPr>
+          <a:xfrm>
+            <a:off x="8549640" y="4480560"/>
+            <a:ext cx="3090672" cy="0"/>
+          </a:xfrm>
+          <a:prstGeom prst="line">
+            <a:avLst/>
+          </a:prstGeom>
+          <a:noFill/>
+          <a:ln w="9525">
+            <a:solidFill>
+              <a:srgbClr val="D5D9DE"/>
+            </a:solidFill>
+            <a:prstDash val="solid"/>
+          </a:ln>
+        </p:spPr>
+      </p:sp>
+      <p:sp>
+        <p:nvSpPr>
+          <p:cNvPr id="10" name="Text 6"/>
+          <p:cNvSpPr txBox="1"/>
+          <p:nvPr/>
+        </p:nvSpPr>
+        <p:spPr>
+          <a:xfrm>
+            <a:off x="8549640" y="4572000"/>
+            <a:ext cx="3090672" cy="256032"/>
+          </a:xfrm>
+          <a:prstGeom prst="rect">
+            <a:avLst/>
+          </a:prstGeom>
+          <a:noFill/>
+          <a:ln/>
+        </p:spPr>
+        <p:txBody>
+          <a:bodyPr wrap="square" lIns="0" tIns="0" rIns="0" bIns="0" rtlCol="0" anchor="t"/>
+          <a:lstStyle/>
+          <a:p>
+            <a:pPr algn="l" indent="0" marL="0">
+              <a:buNone/>
+            </a:pPr>
+            <a:r>
+              <a:rPr lang="en-US" sz="1100" b="1" dirty="0">
+                <a:solidFill>
+                  <a:schemeClr val="accent5"/>
+                </a:solidFill>
+              </a:rPr>
+              <a:t>В ролике</a:t>
+            </a:r>
+            <a:endParaRPr lang="en-US" sz="1100" dirty="0"/>
+          </a:p>
+        </p:txBody>
+      </p:sp>
+      <p:sp>
+        <p:nvSpPr>
+          <p:cNvPr id="11" name="Text 7"/>
+          <p:cNvSpPr txBox="1"/>
+          <p:nvPr/>
+        </p:nvSpPr>
+        <p:spPr>
+          <a:xfrm>
+            <a:off x="8549640" y="4846320"/>
+            <a:ext cx="3090672" cy="1371600"/>
+          </a:xfrm>
+          <a:prstGeom prst="rect">
+            <a:avLst/>
+          </a:prstGeom>
+          <a:noFill/>
+          <a:ln/>
+        </p:spPr>
+        <p:txBody>
+          <a:bodyPr wrap="square" lIns="0" tIns="0" rIns="0" bIns="0" rtlCol="0" anchor="t"/>
+          <a:lstStyle/>
+          <a:p>
+            <a:pPr algn="l" indent="0" marL="0">
+              <a:buNone/>
+            </a:pPr>
+            <a:r>
+              <a:rPr lang="en-US" sz="1250" dirty="0">
+                <a:solidFill>
+                  <a:schemeClr val="tx1"/>
+                </a:solidFill>
+              </a:rPr>
+              <a:t>В этом сценарии: 91,3 очка в быстром симуляторе и 90,9 в Gazebo. Бледная линия справа — путь из быстрого симулятора.</a:t>
+            </a:r>
+            <a:endParaRPr lang="en-US" sz="1250" dirty="0"/>
+          </a:p>
+        </p:txBody>
+      </p:sp>
+    </p:spTree>
+  </p:cSld>
+  <p:clrMapOvr>
+    <a:masterClrMapping/>
+  </p:clrMapOvr>
+</p:sld>
+</file>
+
+<file path=ppt/slides/slide9.xml><?xml version="1.0" encoding="utf-8"?>
+<p:sld xmlns:a="http://schemas.openxmlformats.org/drawingml/2006/main" xmlns:r="http://schemas.openxmlformats.org/officeDocument/2006/relationships" xmlns:p="http://schemas.openxmlformats.org/presentationml/2006/main">
+  <p:cSld name="Slide 9">
+    <p:spTree>
+      <p:nvGrpSpPr>
+        <p:cNvPr id="1" name=""/>
+        <p:cNvGrpSpPr/>
+        <p:nvPr/>
+      </p:nvGrpSpPr>
+      <p:grpSpPr>
+        <a:xfrm>
+          <a:off x="0" y="0"/>
+          <a:ext cx="0" cy="0"/>
+          <a:chOff x="0" y="0"/>
+          <a:chExt cx="0" cy="0"/>
+        </a:xfrm>
+      </p:grpSpPr>
+      <p:sp>
+        <p:nvSpPr>
+          <p:cNvPr id="2" name="Text 0"/>
+          <p:cNvSpPr/>
+          <p:nvPr>
+            <p:ph idx="100" type="title" hasCustomPrompt="1"/>
+          </p:nvPr>
+        </p:nvSpPr>
+        <p:spPr>
+          <a:xfrm>
+            <a:off x="548640" y="384048"/>
+            <a:ext cx="11091672" cy="685800"/>
+          </a:xfrm>
+          <a:prstGeom prst="rect">
+            <a:avLst/>
+          </a:prstGeom>
+          <a:noFill/>
+          <a:ln/>
+        </p:spPr>
+        <p:txBody>
+          <a:bodyPr wrap="square" lIns="0" tIns="0" rIns="0" bIns="0" rtlCol="0" anchor="ctr"/>
+          <a:lstStyle/>
+          <a:p>
+            <a:pPr algn="l" indent="0" marL="0">
+              <a:buNone/>
+            </a:pPr>
+            <a:r>
+              <a:rPr lang="en-US" sz="3200" b="1" dirty="0">
+                <a:solidFill>
+                  <a:schemeClr val="tx1"/>
+                </a:solidFill>
+              </a:rPr>
+              <a:t>Опыт 6. Сбой, который нашёл Gazebo</a:t>
+            </a:r>
+            <a:endParaRPr lang="en-US" sz="3200" dirty="0"/>
+          </a:p>
+        </p:txBody>
+      </p:sp>
+      <p:sp>
+        <p:nvSpPr>
+          <p:cNvPr id="3" name="Text 0"/>
+          <p:cNvSpPr/>
+          <p:nvPr>
+            <p:ph idx="101" type="body" hasCustomPrompt="1"/>
+          </p:nvPr>
+        </p:nvSpPr>
+        <p:spPr>
+          <a:xfrm>
+            <a:off x="548640" y="1097280"/>
+            <a:ext cx="11091672" cy="384048"/>
+          </a:xfrm>
+          <a:prstGeom prst="rect">
+            <a:avLst/>
+          </a:prstGeom>
+          <a:noFill/>
+          <a:ln/>
+        </p:spPr>
+        <p:txBody>
+          <a:bodyPr wrap="square" lIns="0" tIns="0" rIns="0" bIns="0" rtlCol="0" anchor="ctr"/>
+          <a:lstStyle/>
+          <a:p>
+            <a:pPr algn="l" indent="0" marL="0">
+              <a:buNone/>
+            </a:pPr>
+            <a:r>
+              <a:rPr lang="en-US" sz="1600" dirty="0">
+                <a:solidFill>
+                  <a:schemeClr val="accent5"/>
+                </a:solidFill>
+              </a:rPr>
+              <a:t>Трудный сценарий 5 в Gazebo: до правки агента и после неё</a:t>
+            </a:r>
+            <a:endParaRPr lang="en-US" sz="1600" dirty="0"/>
+          </a:p>
+        </p:txBody>
+      </p:sp>
+      <p:pic>
+        <p:nvPicPr>
+          <p:cNvPr id="5" name="Image 0" descr="Трудный сценарий 5 в Gazebo: до правки агента и после неё">    </p:cNvPr>
+          <p:cNvPicPr>
+            <a:picLocks noChangeAspect="1"/>
+          </p:cNvPicPr>
+          <p:nvPr/>
+        </p:nvPicPr>
+        <p:blipFill>
+          <a:blip r:embed="rId1"/>
+          <a:stretch>
+            <a:fillRect/>
+          </a:stretch>
+        </p:blipFill>
+        <p:spPr>
+          <a:xfrm>
+            <a:off x="548640" y="1691640"/>
+            <a:ext cx="7671661" cy="4526280"/>
+          </a:xfrm>
+          <a:prstGeom prst="rect">
+            <a:avLst/>
+          </a:prstGeom>
+        </p:spPr>
+      </p:pic>
+      <p:sp>
+        <p:nvSpPr>
+          <p:cNvPr id="6" name="Text 2"/>
+          <p:cNvSpPr txBox="1"/>
+          <p:nvPr/>
+        </p:nvSpPr>
+        <p:spPr>
+          <a:xfrm>
+            <a:off x="8549640" y="1691640"/>
+            <a:ext cx="3090672" cy="566928"/>
+          </a:xfrm>
+          <a:prstGeom prst="rect">
+            <a:avLst/>
+          </a:prstGeom>
+          <a:noFill/>
+          <a:ln/>
+        </p:spPr>
+        <p:txBody>
+          <a:bodyPr wrap="square" lIns="0" tIns="0" rIns="0" bIns="0" rtlCol="0" anchor="ctr"/>
+          <a:lstStyle/>
+          <a:p>
+            <a:pPr algn="l" indent="0" marL="0">
+              <a:buNone/>
+            </a:pPr>
+            <a:r>
+              <a:rPr lang="en-US" sz="3400" b="1" dirty="0">
+                <a:solidFill>
+                  <a:schemeClr val="accent1"/>
+                </a:solidFill>
+              </a:rPr>
+              <a:t>5 из 5</a:t>
+            </a:r>
+            <a:endParaRPr lang="en-US" sz="3400" dirty="0"/>
+          </a:p>
+        </p:txBody>
+      </p:sp>
+      <p:sp>
+        <p:nvSpPr>
+          <p:cNvPr id="7" name="Text 3"/>
+          <p:cNvSpPr txBox="1"/>
+          <p:nvPr/>
+        </p:nvSpPr>
+        <p:spPr>
+          <a:xfrm>
+            <a:off x="8549640" y="2295144"/>
+            <a:ext cx="3090672" cy="457200"/>
+          </a:xfrm>
+          <a:prstGeom prst="rect">
+            <a:avLst/>
+          </a:prstGeom>
+          <a:noFill/>
+          <a:ln/>
+        </p:spPr>
+        <p:txBody>
+          <a:bodyPr wrap="square" lIns="0" tIns="0" rIns="0" bIns="0" rtlCol="0" anchor="t"/>
+          <a:lstStyle/>
+          <a:p>
+            <a:pPr algn="l" indent="0" marL="0">
+              <a:buNone/>
+            </a:pPr>
+            <a:r>
+              <a:rPr lang="en-US" sz="1200" dirty="0">
+                <a:solidFill>
+                  <a:schemeClr val="accent5"/>
+                </a:solidFill>
+              </a:rPr>
+              <a:t>возвратов на базу после правки, без столкновений</a:t>
+            </a:r>
+            <a:endParaRPr lang="en-US" sz="1200" dirty="0"/>
+          </a:p>
+        </p:txBody>
+      </p:sp>
+      <p:sp>
+        <p:nvSpPr>
+          <p:cNvPr id="8" name="Text 4"/>
+          <p:cNvSpPr txBox="1"/>
+          <p:nvPr/>
+        </p:nvSpPr>
+        <p:spPr>
+          <a:xfrm>
+            <a:off x="8549640" y="2880360"/>
+            <a:ext cx="3090672" cy="1463040"/>
+          </a:xfrm>
+          <a:prstGeom prst="rect">
+            <a:avLst/>
+          </a:prstGeom>
+          <a:noFill/>
+          <a:ln/>
+        </p:spPr>
+        <p:txBody>
+          <a:bodyPr wrap="square" lIns="0" tIns="0" rIns="0" bIns="0" rtlCol="0" anchor="t"/>
+          <a:lstStyle/>
+          <a:p>
+            <a:pPr algn="l" indent="0" marL="0">
+              <a:buNone/>
+            </a:pPr>
+            <a:r>
+              <a:rPr lang="en-US" sz="1500" dirty="0">
+                <a:solidFill>
+                  <a:schemeClr val="tx1"/>
+                </a:solidFill>
+              </a:rPr>
+              <a:t>Робот задел столб, отъехал назад вслепую и потерял положение. В быстром симуляторе этого не было видно.</a:t>
+            </a:r>
+            <a:endParaRPr lang="en-US" sz="1500" dirty="0"/>
+          </a:p>
+        </p:txBody>
+      </p:sp>
+      <p:sp>
+        <p:nvSpPr>
+          <p:cNvPr id="9" name="Shape 5"/>
+          <p:cNvSpPr/>
+          <p:nvPr/>
+        </p:nvSpPr>
+        <p:spPr>
+          <a:xfrm>
+            <a:off x="8549640" y="4480560"/>
+            <a:ext cx="3090672" cy="0"/>
+          </a:xfrm>
+          <a:prstGeom prst="line">
+            <a:avLst/>
+          </a:prstGeom>
+          <a:noFill/>
+          <a:ln w="9525">
+            <a:solidFill>
+              <a:srgbClr val="D5D9DE"/>
+            </a:solidFill>
+            <a:prstDash val="solid"/>
+          </a:ln>
+        </p:spPr>
+      </p:sp>
+      <p:sp>
+        <p:nvSpPr>
+          <p:cNvPr id="10" name="Text 6"/>
+          <p:cNvSpPr txBox="1"/>
+          <p:nvPr/>
+        </p:nvSpPr>
+        <p:spPr>
+          <a:xfrm>
+            <a:off x="8549640" y="4572000"/>
+            <a:ext cx="3090672" cy="256032"/>
+          </a:xfrm>
+          <a:prstGeom prst="rect">
+            <a:avLst/>
+          </a:prstGeom>
+          <a:noFill/>
+          <a:ln/>
+        </p:spPr>
+        <p:txBody>
+          <a:bodyPr wrap="square" lIns="0" tIns="0" rIns="0" bIns="0" rtlCol="0" anchor="t"/>
+          <a:lstStyle/>
+          <a:p>
+            <a:pPr algn="l" indent="0" marL="0">
+              <a:buNone/>
+            </a:pPr>
+            <a:r>
+              <a:rPr lang="en-US" sz="1100" b="1" dirty="0">
+                <a:solidFill>
+                  <a:schemeClr val="accent5"/>
+                </a:solidFill>
+              </a:rPr>
+              <a:t>В ролике</a:t>
+            </a:r>
+            <a:endParaRPr lang="en-US" sz="1100" dirty="0"/>
+          </a:p>
+        </p:txBody>
+      </p:sp>
+      <p:sp>
+        <p:nvSpPr>
+          <p:cNvPr id="11" name="Text 7"/>
+          <p:cNvSpPr txBox="1"/>
+          <p:nvPr/>
+        </p:nvSpPr>
+        <p:spPr>
+          <a:xfrm>
+            <a:off x="8549640" y="4846320"/>
+            <a:ext cx="3090672" cy="1371600"/>
+          </a:xfrm>
+          <a:prstGeom prst="rect">
+            <a:avLst/>
+          </a:prstGeom>
+          <a:noFill/>
+          <a:ln/>
+        </p:spPr>
+        <p:txBody>
+          <a:bodyPr wrap="square" lIns="0" tIns="0" rIns="0" bIns="0" rtlCol="0" anchor="t"/>
+          <a:lstStyle/>
+          <a:p>
+            <a:pPr algn="l" indent="0" marL="0">
+              <a:buNone/>
+            </a:pPr>
+            <a:r>
+              <a:rPr lang="en-US" sz="1250" dirty="0">
+                <a:solidFill>
+                  <a:schemeClr val="tx1"/>
+                </a:solidFill>
+              </a:rPr>
+              <a:t>До правки: 4 столкновения, 37,0 очка; пунктир — где робот себя считал. После: 91,1 очка.</a:t>
+            </a:r>
+            <a:endParaRPr lang="en-US" sz="1250" dirty="0"/>
           </a:p>
         </p:txBody>
       </p:sp>
